--- a/docs/deck/GitScout.pptx
+++ b/docs/deck/GitScout.pptx
@@ -14,6 +14,10 @@
     <p:sldId id="262" r:id="rId8"/>
     <p:sldId id="263" r:id="rId9"/>
     <p:sldId id="264" r:id="rId10"/>
+    <p:sldId id="266" r:id="rId17"/>
+    <p:sldId id="267" r:id="rId18"/>
+    <p:sldId id="268" r:id="rId19"/>
+    <p:sldId id="269" r:id="rId20"/>
     <p:sldId id="265" r:id="rId11"/>
   </p:sldIdLst>
   <p:notesMasterIdLst>
@@ -3143,7 +3147,7 @@
                 <a:ea typeface="Consolas" pitchFamily="34" charset="-122"/>
                 <a:cs typeface="Consolas" pitchFamily="34" charset="-120"/>
               </a:rPr>
-              <a:t>NEXT  09</a:t>
+              <a:t>NEXT  13</a:t>
             </a:r>
             <a:endParaRPr lang="en-US" sz="1100" dirty="0"/>
           </a:p>
@@ -3893,6 +3897,4060 @@
               <a:t>github.com/xors-software/git-scout</a:t>
             </a:r>
             <a:endParaRPr lang="en-US" sz="1400" dirty="0"/>
+          </a:p>
+        </p:txBody>
+      </p:sp>
+    </p:spTree>
+  </p:cSld>
+  <p:clrMapOvr>
+    <a:masterClrMapping/>
+  </p:clrMapOvr>
+</p:sld>
+</file>
+
+<file path=ppt/slides/slide11.xml><?xml version="1.0" encoding="utf-8"?>
+<p:sld xmlns:a="http://schemas.openxmlformats.org/drawingml/2006/main" xmlns:r="http://schemas.openxmlformats.org/officeDocument/2006/relationships" xmlns:p="http://schemas.openxmlformats.org/presentationml/2006/main">
+  <p:cSld name="Slide 4">
+    <p:bg>
+      <p:bgPr>
+        <a:solidFill>
+          <a:srgbClr val="F6F8FA"/>
+        </a:solidFill>
+      </p:bgPr>
+    </p:bg>
+    <p:spTree>
+      <p:nvGrpSpPr>
+        <p:cNvPr id="1" name=""/>
+        <p:cNvGrpSpPr/>
+        <p:nvPr/>
+      </p:nvGrpSpPr>
+      <p:grpSpPr>
+        <a:xfrm>
+          <a:off x="0" y="0"/>
+          <a:ext cx="0" cy="0"/>
+          <a:chOff x="0" y="0"/>
+          <a:chExt cx="0" cy="0"/>
+        </a:xfrm>
+      </p:grpSpPr>
+      <p:sp>
+        <p:nvSpPr>
+          <p:cNvPr id="2" name="Shape 0"/>
+          <p:cNvSpPr/>
+          <p:nvPr/>
+        </p:nvSpPr>
+        <p:spPr>
+          <a:xfrm>
+            <a:off x="548640" y="621792"/>
+            <a:ext cx="228600" cy="73152"/>
+          </a:xfrm>
+          <a:prstGeom prst="rect">
+            <a:avLst/>
+          </a:prstGeom>
+          <a:solidFill>
+            <a:srgbClr val="1F6FEB"/>
+          </a:solidFill>
+          <a:ln w="12700">
+            <a:solidFill>
+              <a:srgbClr val="1F6FEB"/>
+            </a:solidFill>
+            <a:prstDash val="solid"/>
+          </a:ln>
+        </p:spPr>
+      </p:sp>
+      <p:sp>
+        <p:nvSpPr>
+          <p:cNvPr id="3" name="Text 1"/>
+          <p:cNvSpPr/>
+          <p:nvPr/>
+        </p:nvSpPr>
+        <p:spPr>
+          <a:xfrm>
+            <a:off x="914400" y="548640"/>
+            <a:ext cx="3657600" cy="274320"/>
+          </a:xfrm>
+          <a:prstGeom prst="rect">
+            <a:avLst/>
+          </a:prstGeom>
+          <a:noFill/>
+          <a:ln/>
+        </p:spPr>
+        <p:txBody>
+          <a:bodyPr wrap="square" rtlCol="0" anchor="ctr"/>
+          <a:lstStyle/>
+          <a:p>
+            <a:pPr indent="0" marL="0">
+              <a:buNone/>
+            </a:pPr>
+            <a:r>
+              <a:rPr lang="en-US" sz="1100" b="1" spc="600" kern="0" dirty="0">
+                <a:solidFill>
+                  <a:srgbClr val="57606A"/>
+                </a:solidFill>
+                <a:latin typeface="Consolas" pitchFamily="34" charset="0"/>
+                <a:ea typeface="Consolas" pitchFamily="34" charset="-122"/>
+                <a:cs typeface="Consolas" pitchFamily="34" charset="-120"/>
+              </a:rPr>
+              <a:t>REQUIREMENTS  09</a:t>
+            </a:r>
+            <a:endParaRPr lang="en-US" sz="1100" dirty="0"/>
+          </a:p>
+        </p:txBody>
+      </p:sp>
+      <p:sp>
+        <p:nvSpPr>
+          <p:cNvPr id="4" name="Text 2"/>
+          <p:cNvSpPr/>
+          <p:nvPr/>
+        </p:nvSpPr>
+        <p:spPr>
+          <a:xfrm>
+            <a:off x="548640" y="1005840"/>
+            <a:ext cx="9144000" cy="914400"/>
+          </a:xfrm>
+          <a:prstGeom prst="rect">
+            <a:avLst/>
+          </a:prstGeom>
+          <a:noFill/>
+          <a:ln/>
+        </p:spPr>
+        <p:txBody>
+          <a:bodyPr wrap="square" rtlCol="0" anchor="ctr"/>
+          <a:lstStyle/>
+          <a:p>
+            <a:pPr indent="0" marL="0">
+              <a:buNone/>
+            </a:pPr>
+            <a:r>
+              <a:rPr lang="en-US" sz="4000" b="1" dirty="0">
+                <a:solidFill>
+                  <a:srgbClr val="0D1117"/>
+                </a:solidFill>
+                <a:latin typeface="Calibri" pitchFamily="34" charset="0"/>
+                <a:ea typeface="Calibri" pitchFamily="34" charset="-122"/>
+                <a:cs typeface="Calibri" pitchFamily="34" charset="-120"/>
+              </a:rPr>
+              <a:t>Requirements → Delivery.</a:t>
+            </a:r>
+            <a:endParaRPr lang="en-US" sz="4000" dirty="0"/>
+          </a:p>
+        </p:txBody>
+      </p:sp>
+      <p:sp>
+        <p:nvSpPr>
+          <p:cNvPr id="5" name="Text 3"/>
+          <p:cNvSpPr/>
+          <p:nvPr/>
+        </p:nvSpPr>
+        <p:spPr>
+          <a:xfrm>
+            <a:off x="548640" y="1828800"/>
+            <a:ext cx="10972800" cy="457200"/>
+          </a:xfrm>
+          <a:prstGeom prst="rect">
+            <a:avLst/>
+          </a:prstGeom>
+          <a:noFill/>
+          <a:ln/>
+        </p:spPr>
+        <p:txBody>
+          <a:bodyPr wrap="square" rtlCol="0" anchor="ctr"/>
+          <a:lstStyle/>
+          <a:p>
+            <a:pPr indent="0" marL="0">
+              <a:buNone/>
+            </a:pPr>
+            <a:r>
+              <a:rPr lang="en-US" sz="1600" dirty="0">
+                <a:solidFill>
+                  <a:srgbClr val="57606A"/>
+                </a:solidFill>
+                <a:latin typeface="Calibri" pitchFamily="34" charset="0"/>
+                <a:ea typeface="Calibri" pitchFamily="34" charset="-122"/>
+                <a:cs typeface="Calibri" pitchFamily="34" charset="-120"/>
+              </a:rPr>
+              <a:t>Every functional requirement from the SRS ships in v1.0.</a:t>
+            </a:r>
+            <a:endParaRPr lang="en-US" sz="1600" dirty="0"/>
+          </a:p>
+        </p:txBody>
+      </p:sp>
+      <p:sp>
+        <p:nvSpPr>
+          <p:cNvPr id="6" name="Shape 4"/>
+          <p:cNvSpPr/>
+          <p:nvPr/>
+        </p:nvSpPr>
+        <p:spPr>
+          <a:xfrm>
+            <a:off x="548640" y="2514600"/>
+            <a:ext cx="5449824" cy="1600200"/>
+          </a:xfrm>
+          <a:prstGeom prst="rect">
+            <a:avLst/>
+          </a:prstGeom>
+          <a:solidFill>
+            <a:srgbClr val="FFFFFF"/>
+          </a:solidFill>
+          <a:ln w="12700">
+            <a:solidFill>
+              <a:srgbClr val="D0D7DE"/>
+            </a:solidFill>
+            <a:prstDash val="solid"/>
+          </a:ln>
+        </p:spPr>
+      </p:sp>
+      <p:sp>
+        <p:nvSpPr>
+          <p:cNvPr id="7" name="Shape 5"/>
+          <p:cNvSpPr/>
+          <p:nvPr/>
+        </p:nvSpPr>
+        <p:spPr>
+          <a:xfrm>
+            <a:off x="548640" y="2514600"/>
+            <a:ext cx="109728" cy="1600200"/>
+          </a:xfrm>
+          <a:prstGeom prst="rect">
+            <a:avLst/>
+          </a:prstGeom>
+          <a:solidFill>
+            <a:srgbClr val="1F6FEB"/>
+          </a:solidFill>
+          <a:ln w="12700">
+            <a:solidFill>
+              <a:srgbClr val="1F6FEB"/>
+            </a:solidFill>
+            <a:prstDash val="solid"/>
+          </a:ln>
+        </p:spPr>
+      </p:sp>
+      <p:sp>
+        <p:nvSpPr>
+          <p:cNvPr id="8" name="Text 6"/>
+          <p:cNvSpPr/>
+          <p:nvPr/>
+        </p:nvSpPr>
+        <p:spPr>
+          <a:xfrm>
+            <a:off x="822960" y="2651760"/>
+            <a:ext cx="914400" cy="274320"/>
+          </a:xfrm>
+          <a:prstGeom prst="rect">
+            <a:avLst/>
+          </a:prstGeom>
+          <a:noFill/>
+          <a:ln/>
+        </p:spPr>
+        <p:txBody>
+          <a:bodyPr wrap="square" rtlCol="0" anchor="ctr"/>
+          <a:lstStyle/>
+          <a:p>
+            <a:pPr indent="0" marL="0">
+              <a:buNone/>
+            </a:pPr>
+            <a:r>
+              <a:rPr lang="en-US" sz="1100" b="1" spc="400" kern="0" dirty="0">
+                <a:solidFill>
+                  <a:srgbClr val="1F6FEB"/>
+                </a:solidFill>
+                <a:latin typeface="Consolas" pitchFamily="34" charset="0"/>
+                <a:ea typeface="Consolas" pitchFamily="34" charset="-122"/>
+                <a:cs typeface="Consolas" pitchFamily="34" charset="-120"/>
+              </a:rPr>
+              <a:t>01</a:t>
+            </a:r>
+            <a:endParaRPr lang="en-US" sz="1100" dirty="0"/>
+          </a:p>
+        </p:txBody>
+      </p:sp>
+      <p:sp>
+        <p:nvSpPr>
+          <p:cNvPr id="9" name="Text 7"/>
+          <p:cNvSpPr/>
+          <p:nvPr/>
+        </p:nvSpPr>
+        <p:spPr>
+          <a:xfrm>
+            <a:off x="822960" y="2926080"/>
+            <a:ext cx="5029200" cy="411480"/>
+          </a:xfrm>
+          <a:prstGeom prst="rect">
+            <a:avLst/>
+          </a:prstGeom>
+          <a:noFill/>
+          <a:ln/>
+        </p:spPr>
+        <p:txBody>
+          <a:bodyPr wrap="square" rtlCol="0" anchor="ctr"/>
+          <a:lstStyle/>
+          <a:p>
+            <a:pPr indent="0" marL="0">
+              <a:buNone/>
+            </a:pPr>
+            <a:r>
+              <a:rPr lang="en-US" sz="2200" b="1" dirty="0">
+                <a:solidFill>
+                  <a:srgbClr val="0D1117"/>
+                </a:solidFill>
+                <a:latin typeface="Calibri" pitchFamily="34" charset="0"/>
+                <a:ea typeface="Calibri" pitchFamily="34" charset="-122"/>
+                <a:cs typeface="Calibri" pitchFamily="34" charset="-120"/>
+              </a:rPr>
+              <a:t>Search &amp; Filtering</a:t>
+            </a:r>
+            <a:endParaRPr lang="en-US" sz="2200" dirty="0"/>
+          </a:p>
+        </p:txBody>
+      </p:sp>
+      <p:sp>
+        <p:nvSpPr>
+          <p:cNvPr id="10" name="Text 8"/>
+          <p:cNvSpPr/>
+          <p:nvPr/>
+        </p:nvSpPr>
+        <p:spPr>
+          <a:xfrm>
+            <a:off x="822960" y="3383280"/>
+            <a:ext cx="5029200" cy="640080"/>
+          </a:xfrm>
+          <a:prstGeom prst="rect">
+            <a:avLst/>
+          </a:prstGeom>
+          <a:noFill/>
+          <a:ln/>
+        </p:spPr>
+        <p:txBody>
+          <a:bodyPr wrap="square" rtlCol="0" anchor="ctr"/>
+          <a:lstStyle/>
+          <a:p>
+            <a:pPr indent="0" marL="0">
+              <a:buNone/>
+            </a:pPr>
+            <a:r>
+              <a:rPr lang="en-US" sz="1200" dirty="0">
+                <a:solidFill>
+                  <a:srgbClr val="57606A"/>
+                </a:solidFill>
+                <a:latin typeface="Calibri" pitchFamily="34" charset="0"/>
+                <a:ea typeface="Calibri" pitchFamily="34" charset="-122"/>
+                <a:cs typeface="Calibri" pitchFamily="34" charset="-120"/>
+              </a:rPr>
+              <a:t>FR-1 Keyword search. FR-2 Language, location, follower, and repo filters — all live against the GitHub REST API.</a:t>
+            </a:r>
+            <a:endParaRPr lang="en-US" sz="1200" dirty="0"/>
+          </a:p>
+        </p:txBody>
+      </p:sp>
+      <p:sp>
+        <p:nvSpPr>
+          <p:cNvPr id="11" name="Shape 9"/>
+          <p:cNvSpPr/>
+          <p:nvPr/>
+        </p:nvSpPr>
+        <p:spPr>
+          <a:xfrm>
+            <a:off x="6190488" y="2514600"/>
+            <a:ext cx="5449824" cy="1600200"/>
+          </a:xfrm>
+          <a:prstGeom prst="rect">
+            <a:avLst/>
+          </a:prstGeom>
+          <a:solidFill>
+            <a:srgbClr val="FFFFFF"/>
+          </a:solidFill>
+          <a:ln w="12700">
+            <a:solidFill>
+              <a:srgbClr val="D0D7DE"/>
+            </a:solidFill>
+            <a:prstDash val="solid"/>
+          </a:ln>
+        </p:spPr>
+      </p:sp>
+      <p:sp>
+        <p:nvSpPr>
+          <p:cNvPr id="12" name="Shape 10"/>
+          <p:cNvSpPr/>
+          <p:nvPr/>
+        </p:nvSpPr>
+        <p:spPr>
+          <a:xfrm>
+            <a:off x="6190488" y="2514600"/>
+            <a:ext cx="109728" cy="1600200"/>
+          </a:xfrm>
+          <a:prstGeom prst="rect">
+            <a:avLst/>
+          </a:prstGeom>
+          <a:solidFill>
+            <a:srgbClr val="2EA7A5"/>
+          </a:solidFill>
+          <a:ln w="12700">
+            <a:solidFill>
+              <a:srgbClr val="2EA7A5"/>
+            </a:solidFill>
+            <a:prstDash val="solid"/>
+          </a:ln>
+        </p:spPr>
+      </p:sp>
+      <p:sp>
+        <p:nvSpPr>
+          <p:cNvPr id="13" name="Text 11"/>
+          <p:cNvSpPr/>
+          <p:nvPr/>
+        </p:nvSpPr>
+        <p:spPr>
+          <a:xfrm>
+            <a:off x="6464808" y="2651760"/>
+            <a:ext cx="914400" cy="274320"/>
+          </a:xfrm>
+          <a:prstGeom prst="rect">
+            <a:avLst/>
+          </a:prstGeom>
+          <a:noFill/>
+          <a:ln/>
+        </p:spPr>
+        <p:txBody>
+          <a:bodyPr wrap="square" rtlCol="0" anchor="ctr"/>
+          <a:lstStyle/>
+          <a:p>
+            <a:pPr indent="0" marL="0">
+              <a:buNone/>
+            </a:pPr>
+            <a:r>
+              <a:rPr lang="en-US" sz="1100" b="1" spc="400" kern="0" dirty="0">
+                <a:solidFill>
+                  <a:srgbClr val="2EA7A5"/>
+                </a:solidFill>
+                <a:latin typeface="Consolas" pitchFamily="34" charset="0"/>
+                <a:ea typeface="Consolas" pitchFamily="34" charset="-122"/>
+                <a:cs typeface="Consolas" pitchFamily="34" charset="-120"/>
+              </a:rPr>
+              <a:t>02</a:t>
+            </a:r>
+            <a:endParaRPr lang="en-US" sz="1100" dirty="0"/>
+          </a:p>
+        </p:txBody>
+      </p:sp>
+      <p:sp>
+        <p:nvSpPr>
+          <p:cNvPr id="14" name="Text 12"/>
+          <p:cNvSpPr/>
+          <p:nvPr/>
+        </p:nvSpPr>
+        <p:spPr>
+          <a:xfrm>
+            <a:off x="6464808" y="2926080"/>
+            <a:ext cx="5029200" cy="411480"/>
+          </a:xfrm>
+          <a:prstGeom prst="rect">
+            <a:avLst/>
+          </a:prstGeom>
+          <a:noFill/>
+          <a:ln/>
+        </p:spPr>
+        <p:txBody>
+          <a:bodyPr wrap="square" rtlCol="0" anchor="ctr"/>
+          <a:lstStyle/>
+          <a:p>
+            <a:pPr indent="0" marL="0">
+              <a:buNone/>
+            </a:pPr>
+            <a:r>
+              <a:rPr lang="en-US" sz="2200" b="1" dirty="0">
+                <a:solidFill>
+                  <a:srgbClr val="0D1117"/>
+                </a:solidFill>
+                <a:latin typeface="Calibri" pitchFamily="34" charset="0"/>
+                <a:ea typeface="Calibri" pitchFamily="34" charset="-122"/>
+                <a:cs typeface="Calibri" pitchFamily="34" charset="-120"/>
+              </a:rPr>
+              <a:t>Candidate Analytics</a:t>
+            </a:r>
+            <a:endParaRPr lang="en-US" sz="2200" dirty="0"/>
+          </a:p>
+        </p:txBody>
+      </p:sp>
+      <p:sp>
+        <p:nvSpPr>
+          <p:cNvPr id="15" name="Text 13"/>
+          <p:cNvSpPr/>
+          <p:nvPr/>
+        </p:nvSpPr>
+        <p:spPr>
+          <a:xfrm>
+            <a:off x="6464808" y="3383280"/>
+            <a:ext cx="5029200" cy="640080"/>
+          </a:xfrm>
+          <a:prstGeom prst="rect">
+            <a:avLst/>
+          </a:prstGeom>
+          <a:noFill/>
+          <a:ln/>
+        </p:spPr>
+        <p:txBody>
+          <a:bodyPr wrap="square" rtlCol="0" anchor="ctr"/>
+          <a:lstStyle/>
+          <a:p>
+            <a:pPr indent="0" marL="0">
+              <a:buNone/>
+            </a:pPr>
+            <a:r>
+              <a:rPr lang="en-US" sz="1200" dirty="0">
+                <a:solidFill>
+                  <a:srgbClr val="57606A"/>
+                </a:solidFill>
+                <a:latin typeface="Calibri" pitchFamily="34" charset="0"/>
+                <a:ea typeface="Calibri" pitchFamily="34" charset="-122"/>
+                <a:cs typeface="Calibri" pitchFamily="34" charset="-120"/>
+              </a:rPr>
+              <a:t>FR-3 Aggregated repos, stars, and languages. FR-4 90-day activity signal. 5-minute in-process profile cache.</a:t>
+            </a:r>
+            <a:endParaRPr lang="en-US" sz="1200" dirty="0"/>
+          </a:p>
+        </p:txBody>
+      </p:sp>
+      <p:sp>
+        <p:nvSpPr>
+          <p:cNvPr id="16" name="Shape 14"/>
+          <p:cNvSpPr/>
+          <p:nvPr/>
+        </p:nvSpPr>
+        <p:spPr>
+          <a:xfrm>
+            <a:off x="548640" y="4297680"/>
+            <a:ext cx="5449824" cy="1600200"/>
+          </a:xfrm>
+          <a:prstGeom prst="rect">
+            <a:avLst/>
+          </a:prstGeom>
+          <a:solidFill>
+            <a:srgbClr val="FFFFFF"/>
+          </a:solidFill>
+          <a:ln w="12700">
+            <a:solidFill>
+              <a:srgbClr val="D0D7DE"/>
+            </a:solidFill>
+            <a:prstDash val="solid"/>
+          </a:ln>
+        </p:spPr>
+      </p:sp>
+      <p:sp>
+        <p:nvSpPr>
+          <p:cNvPr id="17" name="Shape 15"/>
+          <p:cNvSpPr/>
+          <p:nvPr/>
+        </p:nvSpPr>
+        <p:spPr>
+          <a:xfrm>
+            <a:off x="548640" y="4297680"/>
+            <a:ext cx="109728" cy="1600200"/>
+          </a:xfrm>
+          <a:prstGeom prst="rect">
+            <a:avLst/>
+          </a:prstGeom>
+          <a:solidFill>
+            <a:srgbClr val="8250DF"/>
+          </a:solidFill>
+          <a:ln w="12700">
+            <a:solidFill>
+              <a:srgbClr val="8250DF"/>
+            </a:solidFill>
+            <a:prstDash val="solid"/>
+          </a:ln>
+        </p:spPr>
+      </p:sp>
+      <p:sp>
+        <p:nvSpPr>
+          <p:cNvPr id="18" name="Text 16"/>
+          <p:cNvSpPr/>
+          <p:nvPr/>
+        </p:nvSpPr>
+        <p:spPr>
+          <a:xfrm>
+            <a:off x="822960" y="4434840"/>
+            <a:ext cx="914400" cy="274320"/>
+          </a:xfrm>
+          <a:prstGeom prst="rect">
+            <a:avLst/>
+          </a:prstGeom>
+          <a:noFill/>
+          <a:ln/>
+        </p:spPr>
+        <p:txBody>
+          <a:bodyPr wrap="square" rtlCol="0" anchor="ctr"/>
+          <a:lstStyle/>
+          <a:p>
+            <a:pPr indent="0" marL="0">
+              <a:buNone/>
+            </a:pPr>
+            <a:r>
+              <a:rPr lang="en-US" sz="1100" b="1" spc="400" kern="0" dirty="0">
+                <a:solidFill>
+                  <a:srgbClr val="8250DF"/>
+                </a:solidFill>
+                <a:latin typeface="Consolas" pitchFamily="34" charset="0"/>
+                <a:ea typeface="Consolas" pitchFamily="34" charset="-122"/>
+                <a:cs typeface="Consolas" pitchFamily="34" charset="-120"/>
+              </a:rPr>
+              <a:t>03</a:t>
+            </a:r>
+            <a:endParaRPr lang="en-US" sz="1100" dirty="0"/>
+          </a:p>
+        </p:txBody>
+      </p:sp>
+      <p:sp>
+        <p:nvSpPr>
+          <p:cNvPr id="19" name="Text 17"/>
+          <p:cNvSpPr/>
+          <p:nvPr/>
+        </p:nvSpPr>
+        <p:spPr>
+          <a:xfrm>
+            <a:off x="822960" y="4709160"/>
+            <a:ext cx="5029200" cy="411480"/>
+          </a:xfrm>
+          <a:prstGeom prst="rect">
+            <a:avLst/>
+          </a:prstGeom>
+          <a:noFill/>
+          <a:ln/>
+        </p:spPr>
+        <p:txBody>
+          <a:bodyPr wrap="square" rtlCol="0" anchor="ctr"/>
+          <a:lstStyle/>
+          <a:p>
+            <a:pPr indent="0" marL="0">
+              <a:buNone/>
+            </a:pPr>
+            <a:r>
+              <a:rPr lang="en-US" sz="2200" b="1" dirty="0">
+                <a:solidFill>
+                  <a:srgbClr val="0D1117"/>
+                </a:solidFill>
+                <a:latin typeface="Calibri" pitchFamily="34" charset="0"/>
+                <a:ea typeface="Calibri" pitchFamily="34" charset="-122"/>
+                <a:cs typeface="Calibri" pitchFamily="34" charset="-120"/>
+              </a:rPr>
+              <a:t>Transparent Scoring</a:t>
+            </a:r>
+            <a:endParaRPr lang="en-US" sz="2200" dirty="0"/>
+          </a:p>
+        </p:txBody>
+      </p:sp>
+      <p:sp>
+        <p:nvSpPr>
+          <p:cNvPr id="20" name="Text 18"/>
+          <p:cNvSpPr/>
+          <p:nvPr/>
+        </p:nvSpPr>
+        <p:spPr>
+          <a:xfrm>
+            <a:off x="822960" y="5166360"/>
+            <a:ext cx="5029200" cy="640080"/>
+          </a:xfrm>
+          <a:prstGeom prst="rect">
+            <a:avLst/>
+          </a:prstGeom>
+          <a:noFill/>
+          <a:ln/>
+        </p:spPr>
+        <p:txBody>
+          <a:bodyPr wrap="square" rtlCol="0" anchor="ctr"/>
+          <a:lstStyle/>
+          <a:p>
+            <a:pPr indent="0" marL="0">
+              <a:buNone/>
+            </a:pPr>
+            <a:r>
+              <a:rPr lang="en-US" sz="1200" dirty="0">
+                <a:solidFill>
+                  <a:srgbClr val="57606A"/>
+                </a:solidFill>
+                <a:latin typeface="Calibri" pitchFamily="34" charset="0"/>
+                <a:ea typeface="Calibri" pitchFamily="34" charset="-122"/>
+                <a:cs typeface="Calibri" pitchFamily="34" charset="-120"/>
+              </a:rPr>
+              <a:t>FR-5 0–100 GitScout Score. FR-6 Breakdown by popularity, activity, breadth, and reach — every signal visible in the UI.</a:t>
+            </a:r>
+            <a:endParaRPr lang="en-US" sz="1200" dirty="0"/>
+          </a:p>
+        </p:txBody>
+      </p:sp>
+      <p:sp>
+        <p:nvSpPr>
+          <p:cNvPr id="21" name="Shape 19"/>
+          <p:cNvSpPr/>
+          <p:nvPr/>
+        </p:nvSpPr>
+        <p:spPr>
+          <a:xfrm>
+            <a:off x="6190488" y="4297680"/>
+            <a:ext cx="5449824" cy="1600200"/>
+          </a:xfrm>
+          <a:prstGeom prst="rect">
+            <a:avLst/>
+          </a:prstGeom>
+          <a:solidFill>
+            <a:srgbClr val="FFFFFF"/>
+          </a:solidFill>
+          <a:ln w="12700">
+            <a:solidFill>
+              <a:srgbClr val="D0D7DE"/>
+            </a:solidFill>
+            <a:prstDash val="solid"/>
+          </a:ln>
+        </p:spPr>
+      </p:sp>
+      <p:sp>
+        <p:nvSpPr>
+          <p:cNvPr id="22" name="Shape 20"/>
+          <p:cNvSpPr/>
+          <p:nvPr/>
+        </p:nvSpPr>
+        <p:spPr>
+          <a:xfrm>
+            <a:off x="6190488" y="4297680"/>
+            <a:ext cx="109728" cy="1600200"/>
+          </a:xfrm>
+          <a:prstGeom prst="rect">
+            <a:avLst/>
+          </a:prstGeom>
+          <a:solidFill>
+            <a:srgbClr val="D29922"/>
+          </a:solidFill>
+          <a:ln w="12700">
+            <a:solidFill>
+              <a:srgbClr val="D29922"/>
+            </a:solidFill>
+            <a:prstDash val="solid"/>
+          </a:ln>
+        </p:spPr>
+      </p:sp>
+      <p:sp>
+        <p:nvSpPr>
+          <p:cNvPr id="23" name="Text 21"/>
+          <p:cNvSpPr/>
+          <p:nvPr/>
+        </p:nvSpPr>
+        <p:spPr>
+          <a:xfrm>
+            <a:off x="6464808" y="4434840"/>
+            <a:ext cx="914400" cy="274320"/>
+          </a:xfrm>
+          <a:prstGeom prst="rect">
+            <a:avLst/>
+          </a:prstGeom>
+          <a:noFill/>
+          <a:ln/>
+        </p:spPr>
+        <p:txBody>
+          <a:bodyPr wrap="square" rtlCol="0" anchor="ctr"/>
+          <a:lstStyle/>
+          <a:p>
+            <a:pPr indent="0" marL="0">
+              <a:buNone/>
+            </a:pPr>
+            <a:r>
+              <a:rPr lang="en-US" sz="1100" b="1" spc="400" kern="0" dirty="0">
+                <a:solidFill>
+                  <a:srgbClr val="D29922"/>
+                </a:solidFill>
+                <a:latin typeface="Consolas" pitchFamily="34" charset="0"/>
+                <a:ea typeface="Consolas" pitchFamily="34" charset="-122"/>
+                <a:cs typeface="Consolas" pitchFamily="34" charset="-120"/>
+              </a:rPr>
+              <a:t>04</a:t>
+            </a:r>
+            <a:endParaRPr lang="en-US" sz="1100" dirty="0"/>
+          </a:p>
+        </p:txBody>
+      </p:sp>
+      <p:sp>
+        <p:nvSpPr>
+          <p:cNvPr id="24" name="Text 22"/>
+          <p:cNvSpPr/>
+          <p:nvPr/>
+        </p:nvSpPr>
+        <p:spPr>
+          <a:xfrm>
+            <a:off x="6464808" y="4709160"/>
+            <a:ext cx="5029200" cy="411480"/>
+          </a:xfrm>
+          <a:prstGeom prst="rect">
+            <a:avLst/>
+          </a:prstGeom>
+          <a:noFill/>
+          <a:ln/>
+        </p:spPr>
+        <p:txBody>
+          <a:bodyPr wrap="square" rtlCol="0" anchor="ctr"/>
+          <a:lstStyle/>
+          <a:p>
+            <a:pPr indent="0" marL="0">
+              <a:buNone/>
+            </a:pPr>
+            <a:r>
+              <a:rPr lang="en-US" sz="2200" b="1" dirty="0">
+                <a:solidFill>
+                  <a:srgbClr val="0D1117"/>
+                </a:solidFill>
+                <a:latin typeface="Calibri" pitchFamily="34" charset="0"/>
+                <a:ea typeface="Calibri" pitchFamily="34" charset="-122"/>
+                <a:cs typeface="Calibri" pitchFamily="34" charset="-120"/>
+              </a:rPr>
+              <a:t>Shortlists &amp; Export</a:t>
+            </a:r>
+            <a:endParaRPr lang="en-US" sz="2200" dirty="0"/>
+          </a:p>
+        </p:txBody>
+      </p:sp>
+      <p:sp>
+        <p:nvSpPr>
+          <p:cNvPr id="25" name="Text 23"/>
+          <p:cNvSpPr/>
+          <p:nvPr/>
+        </p:nvSpPr>
+        <p:spPr>
+          <a:xfrm>
+            <a:off x="6464808" y="5166360"/>
+            <a:ext cx="5029200" cy="640080"/>
+          </a:xfrm>
+          <a:prstGeom prst="rect">
+            <a:avLst/>
+          </a:prstGeom>
+          <a:noFill/>
+          <a:ln/>
+        </p:spPr>
+        <p:txBody>
+          <a:bodyPr wrap="square" rtlCol="0" anchor="ctr"/>
+          <a:lstStyle/>
+          <a:p>
+            <a:pPr indent="0" marL="0">
+              <a:buNone/>
+            </a:pPr>
+            <a:r>
+              <a:rPr lang="en-US" sz="1200" dirty="0">
+                <a:solidFill>
+                  <a:srgbClr val="57606A"/>
+                </a:solidFill>
+                <a:latin typeface="Calibri" pitchFamily="34" charset="0"/>
+                <a:ea typeface="Calibri" pitchFamily="34" charset="-122"/>
+                <a:cs typeface="Calibri" pitchFamily="34" charset="-120"/>
+              </a:rPr>
+              <a:t>FR-7 Named shortlists with CRUD and live add/remove. FR-8 Timestamped CSV export for ATS handoff.</a:t>
+            </a:r>
+            <a:endParaRPr lang="en-US" sz="1200" dirty="0"/>
+          </a:p>
+        </p:txBody>
+      </p:sp>
+      <p:sp>
+        <p:nvSpPr>
+          <p:cNvPr id="26" name="Text 24"/>
+          <p:cNvSpPr/>
+          <p:nvPr/>
+        </p:nvSpPr>
+        <p:spPr>
+          <a:xfrm>
+            <a:off x="548640" y="6446520"/>
+            <a:ext cx="1828800" cy="274320"/>
+          </a:xfrm>
+          <a:prstGeom prst="rect">
+            <a:avLst/>
+          </a:prstGeom>
+          <a:noFill/>
+          <a:ln/>
+        </p:spPr>
+        <p:txBody>
+          <a:bodyPr wrap="square" rtlCol="0" anchor="ctr"/>
+          <a:lstStyle/>
+          <a:p>
+            <a:pPr indent="0" marL="0">
+              <a:buNone/>
+            </a:pPr>
+            <a:r>
+              <a:rPr lang="en-US" sz="900" b="1" spc="400" kern="0" dirty="0">
+                <a:solidFill>
+                  <a:srgbClr val="8B949E"/>
+                </a:solidFill>
+                <a:latin typeface="Consolas" pitchFamily="34" charset="0"/>
+                <a:ea typeface="Consolas" pitchFamily="34" charset="-122"/>
+                <a:cs typeface="Consolas" pitchFamily="34" charset="-120"/>
+              </a:rPr>
+              <a:t>GITSCOUT</a:t>
+            </a:r>
+            <a:endParaRPr lang="en-US" sz="900" dirty="0"/>
+          </a:p>
+        </p:txBody>
+      </p:sp>
+      <p:sp>
+        <p:nvSpPr>
+          <p:cNvPr id="27" name="Text 25"/>
+          <p:cNvSpPr/>
+          <p:nvPr/>
+        </p:nvSpPr>
+        <p:spPr>
+          <a:xfrm>
+            <a:off x="4754880" y="6446520"/>
+            <a:ext cx="2743200" cy="274320"/>
+          </a:xfrm>
+          <a:prstGeom prst="rect">
+            <a:avLst/>
+          </a:prstGeom>
+          <a:noFill/>
+          <a:ln/>
+        </p:spPr>
+        <p:txBody>
+          <a:bodyPr wrap="square" rtlCol="0" anchor="ctr"/>
+          <a:lstStyle/>
+          <a:p>
+            <a:pPr algn="ctr" indent="0" marL="0">
+              <a:buNone/>
+            </a:pPr>
+            <a:r>
+              <a:rPr lang="en-US" sz="900" spc="400" kern="0" dirty="0">
+                <a:solidFill>
+                  <a:srgbClr val="8B949E"/>
+                </a:solidFill>
+                <a:latin typeface="Consolas" pitchFamily="34" charset="0"/>
+                <a:ea typeface="Consolas" pitchFamily="34" charset="-122"/>
+                <a:cs typeface="Consolas" pitchFamily="34" charset="-120"/>
+              </a:rPr>
+              <a:t>REQUIREMENTS</a:t>
+            </a:r>
+            <a:endParaRPr lang="en-US" sz="900" dirty="0"/>
+          </a:p>
+        </p:txBody>
+      </p:sp>
+      <p:sp>
+        <p:nvSpPr>
+          <p:cNvPr id="28" name="Text 26"/>
+          <p:cNvSpPr/>
+          <p:nvPr/>
+        </p:nvSpPr>
+        <p:spPr>
+          <a:xfrm>
+            <a:off x="10698480" y="6446520"/>
+            <a:ext cx="914400" cy="274320"/>
+          </a:xfrm>
+          <a:prstGeom prst="rect">
+            <a:avLst/>
+          </a:prstGeom>
+          <a:noFill/>
+          <a:ln/>
+        </p:spPr>
+        <p:txBody>
+          <a:bodyPr wrap="square" rtlCol="0" anchor="ctr"/>
+          <a:lstStyle/>
+          <a:p>
+            <a:pPr algn="r" indent="0" marL="0">
+              <a:buNone/>
+            </a:pPr>
+            <a:r>
+              <a:rPr lang="en-US" sz="900" b="1" dirty="0">
+                <a:solidFill>
+                  <a:srgbClr val="8B949E"/>
+                </a:solidFill>
+                <a:latin typeface="Consolas" pitchFamily="34" charset="0"/>
+                <a:ea typeface="Consolas" pitchFamily="34" charset="-122"/>
+                <a:cs typeface="Consolas" pitchFamily="34" charset="-120"/>
+              </a:rPr>
+              <a:t>10</a:t>
+            </a:r>
+            <a:endParaRPr lang="en-US" sz="900" dirty="0"/>
+          </a:p>
+        </p:txBody>
+      </p:sp>
+    </p:spTree>
+  </p:cSld>
+  <p:clrMapOvr>
+    <a:masterClrMapping/>
+  </p:clrMapOvr>
+</p:sld>
+</file>
+
+<file path=ppt/slides/slide12.xml><?xml version="1.0" encoding="utf-8"?>
+<p:sld xmlns:a="http://schemas.openxmlformats.org/drawingml/2006/main" xmlns:r="http://schemas.openxmlformats.org/officeDocument/2006/relationships" xmlns:p="http://schemas.openxmlformats.org/presentationml/2006/main">
+  <p:cSld name="Slide 6">
+    <p:bg>
+      <p:bgPr>
+        <a:solidFill>
+          <a:srgbClr val="F6F8FA"/>
+        </a:solidFill>
+      </p:bgPr>
+    </p:bg>
+    <p:spTree>
+      <p:nvGrpSpPr>
+        <p:cNvPr id="1" name=""/>
+        <p:cNvGrpSpPr/>
+        <p:nvPr/>
+      </p:nvGrpSpPr>
+      <p:grpSpPr>
+        <a:xfrm>
+          <a:off x="0" y="0"/>
+          <a:ext cx="0" cy="0"/>
+          <a:chOff x="0" y="0"/>
+          <a:chExt cx="0" cy="0"/>
+        </a:xfrm>
+      </p:grpSpPr>
+      <p:sp>
+        <p:nvSpPr>
+          <p:cNvPr id="2" name="Shape 0"/>
+          <p:cNvSpPr/>
+          <p:nvPr/>
+        </p:nvSpPr>
+        <p:spPr>
+          <a:xfrm>
+            <a:off x="548640" y="621792"/>
+            <a:ext cx="228600" cy="73152"/>
+          </a:xfrm>
+          <a:prstGeom prst="rect">
+            <a:avLst/>
+          </a:prstGeom>
+          <a:solidFill>
+            <a:srgbClr val="D29922"/>
+          </a:solidFill>
+          <a:ln w="12700">
+            <a:solidFill>
+              <a:srgbClr val="D29922"/>
+            </a:solidFill>
+            <a:prstDash val="solid"/>
+          </a:ln>
+        </p:spPr>
+      </p:sp>
+      <p:sp>
+        <p:nvSpPr>
+          <p:cNvPr id="3" name="Text 1"/>
+          <p:cNvSpPr/>
+          <p:nvPr/>
+        </p:nvSpPr>
+        <p:spPr>
+          <a:xfrm>
+            <a:off x="914400" y="548640"/>
+            <a:ext cx="3657600" cy="274320"/>
+          </a:xfrm>
+          <a:prstGeom prst="rect">
+            <a:avLst/>
+          </a:prstGeom>
+          <a:noFill/>
+          <a:ln/>
+        </p:spPr>
+        <p:txBody>
+          <a:bodyPr wrap="square" rtlCol="0" anchor="ctr"/>
+          <a:lstStyle/>
+          <a:p>
+            <a:pPr indent="0" marL="0">
+              <a:buNone/>
+            </a:pPr>
+            <a:r>
+              <a:rPr lang="en-US" sz="1100" b="1" spc="600" kern="0" dirty="0">
+                <a:solidFill>
+                  <a:srgbClr val="57606A"/>
+                </a:solidFill>
+                <a:latin typeface="Consolas" pitchFamily="34" charset="0"/>
+                <a:ea typeface="Consolas" pitchFamily="34" charset="-122"/>
+                <a:cs typeface="Consolas" pitchFamily="34" charset="-120"/>
+              </a:rPr>
+              <a:t>TIMELINE  10</a:t>
+            </a:r>
+            <a:endParaRPr lang="en-US" sz="1100" dirty="0"/>
+          </a:p>
+        </p:txBody>
+      </p:sp>
+      <p:sp>
+        <p:nvSpPr>
+          <p:cNvPr id="4" name="Text 2"/>
+          <p:cNvSpPr/>
+          <p:nvPr/>
+        </p:nvSpPr>
+        <p:spPr>
+          <a:xfrm>
+            <a:off x="548640" y="1005840"/>
+            <a:ext cx="9144000" cy="914400"/>
+          </a:xfrm>
+          <a:prstGeom prst="rect">
+            <a:avLst/>
+          </a:prstGeom>
+          <a:noFill/>
+          <a:ln/>
+        </p:spPr>
+        <p:txBody>
+          <a:bodyPr wrap="square" rtlCol="0" anchor="ctr"/>
+          <a:lstStyle/>
+          <a:p>
+            <a:pPr indent="0" marL="0">
+              <a:buNone/>
+            </a:pPr>
+            <a:r>
+              <a:rPr lang="en-US" sz="3200" b="1" dirty="0">
+                <a:solidFill>
+                  <a:srgbClr val="0D1117"/>
+                </a:solidFill>
+                <a:latin typeface="Calibri" pitchFamily="34" charset="0"/>
+                <a:ea typeface="Calibri" pitchFamily="34" charset="-122"/>
+                <a:cs typeface="Calibri" pitchFamily="34" charset="-120"/>
+              </a:rPr>
+              <a:t>Plan → Build → Integrate → Harden.</a:t>
+            </a:r>
+            <a:endParaRPr lang="en-US" sz="3200" dirty="0"/>
+          </a:p>
+        </p:txBody>
+      </p:sp>
+      <p:sp>
+        <p:nvSpPr>
+          <p:cNvPr id="5" name="Text 3"/>
+          <p:cNvSpPr/>
+          <p:nvPr/>
+        </p:nvSpPr>
+        <p:spPr>
+          <a:xfrm>
+            <a:off x="548640" y="1828800"/>
+            <a:ext cx="10972800" cy="457200"/>
+          </a:xfrm>
+          <a:prstGeom prst="rect">
+            <a:avLst/>
+          </a:prstGeom>
+          <a:noFill/>
+          <a:ln/>
+        </p:spPr>
+        <p:txBody>
+          <a:bodyPr wrap="square" rtlCol="0" anchor="ctr"/>
+          <a:lstStyle/>
+          <a:p>
+            <a:pPr indent="0" marL="0">
+              <a:buNone/>
+            </a:pPr>
+            <a:r>
+              <a:rPr lang="en-US" sz="1600" dirty="0">
+                <a:solidFill>
+                  <a:srgbClr val="57606A"/>
+                </a:solidFill>
+                <a:latin typeface="Calibri" pitchFamily="34" charset="0"/>
+                <a:ea typeface="Calibri" pitchFamily="34" charset="-122"/>
+                <a:cs typeface="Calibri" pitchFamily="34" charset="-120"/>
+              </a:rPr>
+              <a:t>Five weeks, six contributors, one tight scope.</a:t>
+            </a:r>
+            <a:endParaRPr lang="en-US" sz="1600" dirty="0"/>
+          </a:p>
+        </p:txBody>
+      </p:sp>
+      <p:sp>
+        <p:nvSpPr>
+          <p:cNvPr id="6" name="Shape 4"/>
+          <p:cNvSpPr/>
+          <p:nvPr/>
+        </p:nvSpPr>
+        <p:spPr>
+          <a:xfrm>
+            <a:off x="548640" y="2651760"/>
+            <a:ext cx="2660904" cy="3383280"/>
+          </a:xfrm>
+          <a:prstGeom prst="rect">
+            <a:avLst/>
+          </a:prstGeom>
+          <a:solidFill>
+            <a:srgbClr val="FFFFFF"/>
+          </a:solidFill>
+          <a:ln w="12700">
+            <a:solidFill>
+              <a:srgbClr val="D0D7DE"/>
+            </a:solidFill>
+            <a:prstDash val="solid"/>
+          </a:ln>
+        </p:spPr>
+      </p:sp>
+      <p:sp>
+        <p:nvSpPr>
+          <p:cNvPr id="7" name="Shape 5"/>
+          <p:cNvSpPr/>
+          <p:nvPr/>
+        </p:nvSpPr>
+        <p:spPr>
+          <a:xfrm>
+            <a:off x="548640" y="2651760"/>
+            <a:ext cx="2660904" cy="73152"/>
+          </a:xfrm>
+          <a:prstGeom prst="rect">
+            <a:avLst/>
+          </a:prstGeom>
+          <a:solidFill>
+            <a:srgbClr val="1F6FEB"/>
+          </a:solidFill>
+          <a:ln w="12700">
+            <a:solidFill>
+              <a:srgbClr val="1F6FEB"/>
+            </a:solidFill>
+            <a:prstDash val="solid"/>
+          </a:ln>
+        </p:spPr>
+      </p:sp>
+      <p:sp>
+        <p:nvSpPr>
+          <p:cNvPr id="8" name="Text 6"/>
+          <p:cNvSpPr/>
+          <p:nvPr/>
+        </p:nvSpPr>
+        <p:spPr>
+          <a:xfrm>
+            <a:off x="777240" y="2880360"/>
+            <a:ext cx="1371600" cy="365760"/>
+          </a:xfrm>
+          <a:prstGeom prst="rect">
+            <a:avLst/>
+          </a:prstGeom>
+          <a:noFill/>
+          <a:ln/>
+        </p:spPr>
+        <p:txBody>
+          <a:bodyPr wrap="square" rtlCol="0" anchor="ctr"/>
+          <a:lstStyle/>
+          <a:p>
+            <a:pPr indent="0" marL="0">
+              <a:buNone/>
+            </a:pPr>
+            <a:r>
+              <a:rPr lang="en-US" sz="1300" b="1" spc="400" kern="0" dirty="0">
+                <a:solidFill>
+                  <a:srgbClr val="1F6FEB"/>
+                </a:solidFill>
+                <a:latin typeface="Consolas" pitchFamily="34" charset="0"/>
+                <a:ea typeface="Consolas" pitchFamily="34" charset="-122"/>
+                <a:cs typeface="Consolas" pitchFamily="34" charset="-120"/>
+              </a:rPr>
+              <a:t>01</a:t>
+            </a:r>
+            <a:endParaRPr lang="en-US" sz="1300" dirty="0"/>
+          </a:p>
+        </p:txBody>
+      </p:sp>
+      <p:sp>
+        <p:nvSpPr>
+          <p:cNvPr id="9" name="Text 7"/>
+          <p:cNvSpPr/>
+          <p:nvPr/>
+        </p:nvSpPr>
+        <p:spPr>
+          <a:xfrm>
+            <a:off x="777240" y="3291840"/>
+            <a:ext cx="2286000" cy="502920"/>
+          </a:xfrm>
+          <a:prstGeom prst="rect">
+            <a:avLst/>
+          </a:prstGeom>
+          <a:noFill/>
+          <a:ln/>
+        </p:spPr>
+        <p:txBody>
+          <a:bodyPr wrap="square" rtlCol="0" anchor="ctr"/>
+          <a:lstStyle/>
+          <a:p>
+            <a:pPr indent="0" marL="0">
+              <a:buNone/>
+            </a:pPr>
+            <a:r>
+              <a:rPr lang="en-US" sz="2600" b="1" dirty="0">
+                <a:solidFill>
+                  <a:srgbClr val="0D1117"/>
+                </a:solidFill>
+                <a:latin typeface="Calibri" pitchFamily="34" charset="0"/>
+                <a:ea typeface="Calibri" pitchFamily="34" charset="-122"/>
+                <a:cs typeface="Calibri" pitchFamily="34" charset="-120"/>
+              </a:rPr>
+              <a:t>Plan &amp; Design</a:t>
+            </a:r>
+            <a:endParaRPr lang="en-US" sz="2600" dirty="0"/>
+          </a:p>
+        </p:txBody>
+      </p:sp>
+      <p:sp>
+        <p:nvSpPr>
+          <p:cNvPr id="10" name="Text 8"/>
+          <p:cNvSpPr/>
+          <p:nvPr/>
+        </p:nvSpPr>
+        <p:spPr>
+          <a:xfrm>
+            <a:off x="777240" y="3886200"/>
+            <a:ext cx="2286000" cy="1005840"/>
+          </a:xfrm>
+          <a:prstGeom prst="rect">
+            <a:avLst/>
+          </a:prstGeom>
+          <a:noFill/>
+          <a:ln/>
+        </p:spPr>
+        <p:txBody>
+          <a:bodyPr wrap="square" rtlCol="0" anchor="ctr"/>
+          <a:lstStyle/>
+          <a:p>
+            <a:pPr indent="0" marL="0">
+              <a:buNone/>
+            </a:pPr>
+            <a:r>
+              <a:rPr lang="en-US" sz="1200" dirty="0">
+                <a:solidFill>
+                  <a:srgbClr val="57606A"/>
+                </a:solidFill>
+                <a:latin typeface="Calibri" pitchFamily="34" charset="0"/>
+                <a:ea typeface="Calibri" pitchFamily="34" charset="-122"/>
+                <a:cs typeface="Calibri" pitchFamily="34" charset="-120"/>
+              </a:rPr>
+              <a:t>SRS, SPMP, SCM plan. UI mocks. Stack choice. Scoring weights agreed.</a:t>
+            </a:r>
+            <a:endParaRPr lang="en-US" sz="1200" dirty="0"/>
+          </a:p>
+        </p:txBody>
+      </p:sp>
+      <p:sp>
+        <p:nvSpPr>
+          <p:cNvPr id="11" name="Shape 9"/>
+          <p:cNvSpPr/>
+          <p:nvPr/>
+        </p:nvSpPr>
+        <p:spPr>
+          <a:xfrm>
+            <a:off x="777240" y="5074920"/>
+            <a:ext cx="2194560" cy="0"/>
+          </a:xfrm>
+          <a:prstGeom prst="line">
+            <a:avLst/>
+          </a:prstGeom>
+          <a:noFill/>
+          <a:ln w="12700">
+            <a:solidFill>
+              <a:srgbClr val="E6EAEE"/>
+            </a:solidFill>
+            <a:prstDash val="solid"/>
+          </a:ln>
+        </p:spPr>
+      </p:sp>
+      <p:sp>
+        <p:nvSpPr>
+          <p:cNvPr id="12" name="Text 10"/>
+          <p:cNvSpPr/>
+          <p:nvPr/>
+        </p:nvSpPr>
+        <p:spPr>
+          <a:xfrm>
+            <a:off x="777240" y="5212080"/>
+            <a:ext cx="2286000" cy="640080"/>
+          </a:xfrm>
+          <a:prstGeom prst="rect">
+            <a:avLst/>
+          </a:prstGeom>
+          <a:noFill/>
+          <a:ln/>
+        </p:spPr>
+        <p:txBody>
+          <a:bodyPr wrap="square" rtlCol="0" anchor="ctr"/>
+          <a:lstStyle/>
+          <a:p>
+            <a:pPr indent="0" marL="0">
+              <a:buNone/>
+            </a:pPr>
+            <a:r>
+              <a:rPr lang="en-US" sz="1000" b="1" dirty="0">
+                <a:solidFill>
+                  <a:srgbClr val="1F6FEB"/>
+                </a:solidFill>
+                <a:latin typeface="Consolas" pitchFamily="34" charset="0"/>
+                <a:ea typeface="Consolas" pitchFamily="34" charset="-122"/>
+                <a:cs typeface="Consolas" pitchFamily="34" charset="-120"/>
+              </a:rPr>
+              <a:t>Week 1</a:t>
+            </a:r>
+            <a:endParaRPr lang="en-US" sz="1000" dirty="0"/>
+          </a:p>
+        </p:txBody>
+      </p:sp>
+      <p:sp>
+        <p:nvSpPr>
+          <p:cNvPr id="13" name="Shape 11"/>
+          <p:cNvSpPr/>
+          <p:nvPr/>
+        </p:nvSpPr>
+        <p:spPr>
+          <a:xfrm>
+            <a:off x="3392424" y="2651760"/>
+            <a:ext cx="2660904" cy="3383280"/>
+          </a:xfrm>
+          <a:prstGeom prst="rect">
+            <a:avLst/>
+          </a:prstGeom>
+          <a:solidFill>
+            <a:srgbClr val="FFFFFF"/>
+          </a:solidFill>
+          <a:ln w="12700">
+            <a:solidFill>
+              <a:srgbClr val="D0D7DE"/>
+            </a:solidFill>
+            <a:prstDash val="solid"/>
+          </a:ln>
+        </p:spPr>
+      </p:sp>
+      <p:sp>
+        <p:nvSpPr>
+          <p:cNvPr id="14" name="Shape 12"/>
+          <p:cNvSpPr/>
+          <p:nvPr/>
+        </p:nvSpPr>
+        <p:spPr>
+          <a:xfrm>
+            <a:off x="3392424" y="2651760"/>
+            <a:ext cx="2660904" cy="73152"/>
+          </a:xfrm>
+          <a:prstGeom prst="rect">
+            <a:avLst/>
+          </a:prstGeom>
+          <a:solidFill>
+            <a:srgbClr val="1F6FEB"/>
+          </a:solidFill>
+          <a:ln w="12700">
+            <a:solidFill>
+              <a:srgbClr val="1F6FEB"/>
+            </a:solidFill>
+            <a:prstDash val="solid"/>
+          </a:ln>
+        </p:spPr>
+      </p:sp>
+      <p:sp>
+        <p:nvSpPr>
+          <p:cNvPr id="15" name="Text 13"/>
+          <p:cNvSpPr/>
+          <p:nvPr/>
+        </p:nvSpPr>
+        <p:spPr>
+          <a:xfrm>
+            <a:off x="3621024" y="2880360"/>
+            <a:ext cx="1371600" cy="365760"/>
+          </a:xfrm>
+          <a:prstGeom prst="rect">
+            <a:avLst/>
+          </a:prstGeom>
+          <a:noFill/>
+          <a:ln/>
+        </p:spPr>
+        <p:txBody>
+          <a:bodyPr wrap="square" rtlCol="0" anchor="ctr"/>
+          <a:lstStyle/>
+          <a:p>
+            <a:pPr indent="0" marL="0">
+              <a:buNone/>
+            </a:pPr>
+            <a:r>
+              <a:rPr lang="en-US" sz="1300" b="1" spc="400" kern="0" dirty="0">
+                <a:solidFill>
+                  <a:srgbClr val="1F6FEB"/>
+                </a:solidFill>
+                <a:latin typeface="Consolas" pitchFamily="34" charset="0"/>
+                <a:ea typeface="Consolas" pitchFamily="34" charset="-122"/>
+                <a:cs typeface="Consolas" pitchFamily="34" charset="-120"/>
+              </a:rPr>
+              <a:t>02</a:t>
+            </a:r>
+            <a:endParaRPr lang="en-US" sz="1300" dirty="0"/>
+          </a:p>
+        </p:txBody>
+      </p:sp>
+      <p:sp>
+        <p:nvSpPr>
+          <p:cNvPr id="16" name="Text 14"/>
+          <p:cNvSpPr/>
+          <p:nvPr/>
+        </p:nvSpPr>
+        <p:spPr>
+          <a:xfrm>
+            <a:off x="3621024" y="3291840"/>
+            <a:ext cx="2286000" cy="502920"/>
+          </a:xfrm>
+          <a:prstGeom prst="rect">
+            <a:avLst/>
+          </a:prstGeom>
+          <a:noFill/>
+          <a:ln/>
+        </p:spPr>
+        <p:txBody>
+          <a:bodyPr wrap="square" rtlCol="0" anchor="ctr"/>
+          <a:lstStyle/>
+          <a:p>
+            <a:pPr indent="0" marL="0">
+              <a:buNone/>
+            </a:pPr>
+            <a:r>
+              <a:rPr lang="en-US" sz="2600" b="1" dirty="0">
+                <a:solidFill>
+                  <a:srgbClr val="0D1117"/>
+                </a:solidFill>
+                <a:latin typeface="Calibri" pitchFamily="34" charset="0"/>
+                <a:ea typeface="Calibri" pitchFamily="34" charset="-122"/>
+                <a:cs typeface="Calibri" pitchFamily="34" charset="-120"/>
+              </a:rPr>
+              <a:t>Core Backend</a:t>
+            </a:r>
+            <a:endParaRPr lang="en-US" sz="2600" dirty="0"/>
+          </a:p>
+        </p:txBody>
+      </p:sp>
+      <p:sp>
+        <p:nvSpPr>
+          <p:cNvPr id="17" name="Text 15"/>
+          <p:cNvSpPr/>
+          <p:nvPr/>
+        </p:nvSpPr>
+        <p:spPr>
+          <a:xfrm>
+            <a:off x="3621024" y="3886200"/>
+            <a:ext cx="2286000" cy="1005840"/>
+          </a:xfrm>
+          <a:prstGeom prst="rect">
+            <a:avLst/>
+          </a:prstGeom>
+          <a:noFill/>
+          <a:ln/>
+        </p:spPr>
+        <p:txBody>
+          <a:bodyPr wrap="square" rtlCol="0" anchor="ctr"/>
+          <a:lstStyle/>
+          <a:p>
+            <a:pPr indent="0" marL="0">
+              <a:buNone/>
+            </a:pPr>
+            <a:r>
+              <a:rPr lang="en-US" sz="1200" dirty="0">
+                <a:solidFill>
+                  <a:srgbClr val="57606A"/>
+                </a:solidFill>
+                <a:latin typeface="Calibri" pitchFamily="34" charset="0"/>
+                <a:ea typeface="Calibri" pitchFamily="34" charset="-122"/>
+                <a:cs typeface="Calibri" pitchFamily="34" charset="-120"/>
+              </a:rPr>
+              <a:t>Elysia app factory, SQLite migrations, Octokit + cache, scoring algorithm with tests.</a:t>
+            </a:r>
+            <a:endParaRPr lang="en-US" sz="1200" dirty="0"/>
+          </a:p>
+        </p:txBody>
+      </p:sp>
+      <p:sp>
+        <p:nvSpPr>
+          <p:cNvPr id="18" name="Shape 16"/>
+          <p:cNvSpPr/>
+          <p:nvPr/>
+        </p:nvSpPr>
+        <p:spPr>
+          <a:xfrm>
+            <a:off x="3621024" y="5074920"/>
+            <a:ext cx="2194560" cy="0"/>
+          </a:xfrm>
+          <a:prstGeom prst="line">
+            <a:avLst/>
+          </a:prstGeom>
+          <a:noFill/>
+          <a:ln w="12700">
+            <a:solidFill>
+              <a:srgbClr val="E6EAEE"/>
+            </a:solidFill>
+            <a:prstDash val="solid"/>
+          </a:ln>
+        </p:spPr>
+      </p:sp>
+      <p:sp>
+        <p:nvSpPr>
+          <p:cNvPr id="19" name="Text 17"/>
+          <p:cNvSpPr/>
+          <p:nvPr/>
+        </p:nvSpPr>
+        <p:spPr>
+          <a:xfrm>
+            <a:off x="3621024" y="5212080"/>
+            <a:ext cx="2286000" cy="640080"/>
+          </a:xfrm>
+          <a:prstGeom prst="rect">
+            <a:avLst/>
+          </a:prstGeom>
+          <a:noFill/>
+          <a:ln/>
+        </p:spPr>
+        <p:txBody>
+          <a:bodyPr wrap="square" rtlCol="0" anchor="ctr"/>
+          <a:lstStyle/>
+          <a:p>
+            <a:pPr indent="0" marL="0">
+              <a:buNone/>
+            </a:pPr>
+            <a:r>
+              <a:rPr lang="en-US" sz="1000" b="1" dirty="0">
+                <a:solidFill>
+                  <a:srgbClr val="1F6FEB"/>
+                </a:solidFill>
+                <a:latin typeface="Consolas" pitchFamily="34" charset="0"/>
+                <a:ea typeface="Consolas" pitchFamily="34" charset="-122"/>
+                <a:cs typeface="Consolas" pitchFamily="34" charset="-120"/>
+              </a:rPr>
+              <a:t>Weeks 2-3</a:t>
+            </a:r>
+            <a:endParaRPr lang="en-US" sz="1000" dirty="0"/>
+          </a:p>
+        </p:txBody>
+      </p:sp>
+      <p:sp>
+        <p:nvSpPr>
+          <p:cNvPr id="20" name="Shape 18"/>
+          <p:cNvSpPr/>
+          <p:nvPr/>
+        </p:nvSpPr>
+        <p:spPr>
+          <a:xfrm>
+            <a:off x="6236208" y="2651760"/>
+            <a:ext cx="2660904" cy="3383280"/>
+          </a:xfrm>
+          <a:prstGeom prst="rect">
+            <a:avLst/>
+          </a:prstGeom>
+          <a:solidFill>
+            <a:srgbClr val="FFFFFF"/>
+          </a:solidFill>
+          <a:ln w="12700">
+            <a:solidFill>
+              <a:srgbClr val="D0D7DE"/>
+            </a:solidFill>
+            <a:prstDash val="solid"/>
+          </a:ln>
+        </p:spPr>
+      </p:sp>
+      <p:sp>
+        <p:nvSpPr>
+          <p:cNvPr id="21" name="Shape 19"/>
+          <p:cNvSpPr/>
+          <p:nvPr/>
+        </p:nvSpPr>
+        <p:spPr>
+          <a:xfrm>
+            <a:off x="6236208" y="2651760"/>
+            <a:ext cx="2660904" cy="73152"/>
+          </a:xfrm>
+          <a:prstGeom prst="rect">
+            <a:avLst/>
+          </a:prstGeom>
+          <a:solidFill>
+            <a:srgbClr val="1F6FEB"/>
+          </a:solidFill>
+          <a:ln w="12700">
+            <a:solidFill>
+              <a:srgbClr val="1F6FEB"/>
+            </a:solidFill>
+            <a:prstDash val="solid"/>
+          </a:ln>
+        </p:spPr>
+      </p:sp>
+      <p:sp>
+        <p:nvSpPr>
+          <p:cNvPr id="22" name="Text 20"/>
+          <p:cNvSpPr/>
+          <p:nvPr/>
+        </p:nvSpPr>
+        <p:spPr>
+          <a:xfrm>
+            <a:off x="6464808" y="2880360"/>
+            <a:ext cx="1371600" cy="365760"/>
+          </a:xfrm>
+          <a:prstGeom prst="rect">
+            <a:avLst/>
+          </a:prstGeom>
+          <a:noFill/>
+          <a:ln/>
+        </p:spPr>
+        <p:txBody>
+          <a:bodyPr wrap="square" rtlCol="0" anchor="ctr"/>
+          <a:lstStyle/>
+          <a:p>
+            <a:pPr indent="0" marL="0">
+              <a:buNone/>
+            </a:pPr>
+            <a:r>
+              <a:rPr lang="en-US" sz="1300" b="1" spc="400" kern="0" dirty="0">
+                <a:solidFill>
+                  <a:srgbClr val="1F6FEB"/>
+                </a:solidFill>
+                <a:latin typeface="Consolas" pitchFamily="34" charset="0"/>
+                <a:ea typeface="Consolas" pitchFamily="34" charset="-122"/>
+                <a:cs typeface="Consolas" pitchFamily="34" charset="-120"/>
+              </a:rPr>
+              <a:t>03</a:t>
+            </a:r>
+            <a:endParaRPr lang="en-US" sz="1300" dirty="0"/>
+          </a:p>
+        </p:txBody>
+      </p:sp>
+      <p:sp>
+        <p:nvSpPr>
+          <p:cNvPr id="23" name="Text 21"/>
+          <p:cNvSpPr/>
+          <p:nvPr/>
+        </p:nvSpPr>
+        <p:spPr>
+          <a:xfrm>
+            <a:off x="6464808" y="3291840"/>
+            <a:ext cx="2286000" cy="502920"/>
+          </a:xfrm>
+          <a:prstGeom prst="rect">
+            <a:avLst/>
+          </a:prstGeom>
+          <a:noFill/>
+          <a:ln/>
+        </p:spPr>
+        <p:txBody>
+          <a:bodyPr wrap="square" rtlCol="0" anchor="ctr"/>
+          <a:lstStyle/>
+          <a:p>
+            <a:pPr indent="0" marL="0">
+              <a:buNone/>
+            </a:pPr>
+            <a:r>
+              <a:rPr lang="en-US" sz="2600" b="1" dirty="0">
+                <a:solidFill>
+                  <a:srgbClr val="0D1117"/>
+                </a:solidFill>
+                <a:latin typeface="Calibri" pitchFamily="34" charset="0"/>
+                <a:ea typeface="Calibri" pitchFamily="34" charset="-122"/>
+                <a:cs typeface="Calibri" pitchFamily="34" charset="-120"/>
+              </a:rPr>
+              <a:t>Frontend</a:t>
+            </a:r>
+            <a:endParaRPr lang="en-US" sz="2600" dirty="0"/>
+          </a:p>
+        </p:txBody>
+      </p:sp>
+      <p:sp>
+        <p:nvSpPr>
+          <p:cNvPr id="24" name="Text 22"/>
+          <p:cNvSpPr/>
+          <p:nvPr/>
+        </p:nvSpPr>
+        <p:spPr>
+          <a:xfrm>
+            <a:off x="6464808" y="3886200"/>
+            <a:ext cx="2286000" cy="1005840"/>
+          </a:xfrm>
+          <a:prstGeom prst="rect">
+            <a:avLst/>
+          </a:prstGeom>
+          <a:noFill/>
+          <a:ln/>
+        </p:spPr>
+        <p:txBody>
+          <a:bodyPr wrap="square" rtlCol="0" anchor="ctr"/>
+          <a:lstStyle/>
+          <a:p>
+            <a:pPr indent="0" marL="0">
+              <a:buNone/>
+            </a:pPr>
+            <a:r>
+              <a:rPr lang="en-US" sz="1200" dirty="0">
+                <a:solidFill>
+                  <a:srgbClr val="57606A"/>
+                </a:solidFill>
+                <a:latin typeface="Calibri" pitchFamily="34" charset="0"/>
+                <a:ea typeface="Calibri" pitchFamily="34" charset="-122"/>
+                <a:cs typeface="Calibri" pitchFamily="34" charset="-120"/>
+              </a:rPr>
+              <a:t>Next.js pages, React Query hooks, shadcn/ui components. Live API integration.</a:t>
+            </a:r>
+            <a:endParaRPr lang="en-US" sz="1200" dirty="0"/>
+          </a:p>
+        </p:txBody>
+      </p:sp>
+      <p:sp>
+        <p:nvSpPr>
+          <p:cNvPr id="25" name="Shape 23"/>
+          <p:cNvSpPr/>
+          <p:nvPr/>
+        </p:nvSpPr>
+        <p:spPr>
+          <a:xfrm>
+            <a:off x="6464808" y="5074920"/>
+            <a:ext cx="2194560" cy="0"/>
+          </a:xfrm>
+          <a:prstGeom prst="line">
+            <a:avLst/>
+          </a:prstGeom>
+          <a:noFill/>
+          <a:ln w="12700">
+            <a:solidFill>
+              <a:srgbClr val="E6EAEE"/>
+            </a:solidFill>
+            <a:prstDash val="solid"/>
+          </a:ln>
+        </p:spPr>
+      </p:sp>
+      <p:sp>
+        <p:nvSpPr>
+          <p:cNvPr id="26" name="Text 24"/>
+          <p:cNvSpPr/>
+          <p:nvPr/>
+        </p:nvSpPr>
+        <p:spPr>
+          <a:xfrm>
+            <a:off x="6464808" y="5212080"/>
+            <a:ext cx="2286000" cy="640080"/>
+          </a:xfrm>
+          <a:prstGeom prst="rect">
+            <a:avLst/>
+          </a:prstGeom>
+          <a:noFill/>
+          <a:ln/>
+        </p:spPr>
+        <p:txBody>
+          <a:bodyPr wrap="square" rtlCol="0" anchor="ctr"/>
+          <a:lstStyle/>
+          <a:p>
+            <a:pPr indent="0" marL="0">
+              <a:buNone/>
+            </a:pPr>
+            <a:r>
+              <a:rPr lang="en-US" sz="1000" b="1" dirty="0">
+                <a:solidFill>
+                  <a:srgbClr val="1F6FEB"/>
+                </a:solidFill>
+                <a:latin typeface="Consolas" pitchFamily="34" charset="0"/>
+                <a:ea typeface="Consolas" pitchFamily="34" charset="-122"/>
+                <a:cs typeface="Consolas" pitchFamily="34" charset="-120"/>
+              </a:rPr>
+              <a:t>Week 4</a:t>
+            </a:r>
+            <a:endParaRPr lang="en-US" sz="1000" dirty="0"/>
+          </a:p>
+        </p:txBody>
+      </p:sp>
+      <p:sp>
+        <p:nvSpPr>
+          <p:cNvPr id="27" name="Shape 25"/>
+          <p:cNvSpPr/>
+          <p:nvPr/>
+        </p:nvSpPr>
+        <p:spPr>
+          <a:xfrm>
+            <a:off x="9079992" y="2651760"/>
+            <a:ext cx="2660904" cy="3383280"/>
+          </a:xfrm>
+          <a:prstGeom prst="rect">
+            <a:avLst/>
+          </a:prstGeom>
+          <a:solidFill>
+            <a:srgbClr val="FFFFFF"/>
+          </a:solidFill>
+          <a:ln w="12700">
+            <a:solidFill>
+              <a:srgbClr val="D0D7DE"/>
+            </a:solidFill>
+            <a:prstDash val="solid"/>
+          </a:ln>
+        </p:spPr>
+      </p:sp>
+      <p:sp>
+        <p:nvSpPr>
+          <p:cNvPr id="28" name="Shape 26"/>
+          <p:cNvSpPr/>
+          <p:nvPr/>
+        </p:nvSpPr>
+        <p:spPr>
+          <a:xfrm>
+            <a:off x="9079992" y="2651760"/>
+            <a:ext cx="2660904" cy="73152"/>
+          </a:xfrm>
+          <a:prstGeom prst="rect">
+            <a:avLst/>
+          </a:prstGeom>
+          <a:solidFill>
+            <a:srgbClr val="1F6FEB"/>
+          </a:solidFill>
+          <a:ln w="12700">
+            <a:solidFill>
+              <a:srgbClr val="1F6FEB"/>
+            </a:solidFill>
+            <a:prstDash val="solid"/>
+          </a:ln>
+        </p:spPr>
+      </p:sp>
+      <p:sp>
+        <p:nvSpPr>
+          <p:cNvPr id="29" name="Text 27"/>
+          <p:cNvSpPr/>
+          <p:nvPr/>
+        </p:nvSpPr>
+        <p:spPr>
+          <a:xfrm>
+            <a:off x="9308592" y="2880360"/>
+            <a:ext cx="1371600" cy="365760"/>
+          </a:xfrm>
+          <a:prstGeom prst="rect">
+            <a:avLst/>
+          </a:prstGeom>
+          <a:noFill/>
+          <a:ln/>
+        </p:spPr>
+        <p:txBody>
+          <a:bodyPr wrap="square" rtlCol="0" anchor="ctr"/>
+          <a:lstStyle/>
+          <a:p>
+            <a:pPr indent="0" marL="0">
+              <a:buNone/>
+            </a:pPr>
+            <a:r>
+              <a:rPr lang="en-US" sz="1300" b="1" spc="400" kern="0" dirty="0">
+                <a:solidFill>
+                  <a:srgbClr val="1F6FEB"/>
+                </a:solidFill>
+                <a:latin typeface="Consolas" pitchFamily="34" charset="0"/>
+                <a:ea typeface="Consolas" pitchFamily="34" charset="-122"/>
+                <a:cs typeface="Consolas" pitchFamily="34" charset="-120"/>
+              </a:rPr>
+              <a:t>04</a:t>
+            </a:r>
+            <a:endParaRPr lang="en-US" sz="1300" dirty="0"/>
+          </a:p>
+        </p:txBody>
+      </p:sp>
+      <p:sp>
+        <p:nvSpPr>
+          <p:cNvPr id="30" name="Text 28"/>
+          <p:cNvSpPr/>
+          <p:nvPr/>
+        </p:nvSpPr>
+        <p:spPr>
+          <a:xfrm>
+            <a:off x="9308592" y="3291840"/>
+            <a:ext cx="2286000" cy="502920"/>
+          </a:xfrm>
+          <a:prstGeom prst="rect">
+            <a:avLst/>
+          </a:prstGeom>
+          <a:noFill/>
+          <a:ln/>
+        </p:spPr>
+        <p:txBody>
+          <a:bodyPr wrap="square" rtlCol="0" anchor="ctr"/>
+          <a:lstStyle/>
+          <a:p>
+            <a:pPr indent="0" marL="0">
+              <a:buNone/>
+            </a:pPr>
+            <a:r>
+              <a:rPr lang="en-US" sz="2600" b="1" dirty="0">
+                <a:solidFill>
+                  <a:srgbClr val="0D1117"/>
+                </a:solidFill>
+                <a:latin typeface="Calibri" pitchFamily="34" charset="0"/>
+                <a:ea typeface="Calibri" pitchFamily="34" charset="-122"/>
+                <a:cs typeface="Calibri" pitchFamily="34" charset="-120"/>
+              </a:rPr>
+              <a:t>Harden &amp; Ship</a:t>
+            </a:r>
+            <a:endParaRPr lang="en-US" sz="2600" dirty="0"/>
+          </a:p>
+        </p:txBody>
+      </p:sp>
+      <p:sp>
+        <p:nvSpPr>
+          <p:cNvPr id="31" name="Text 29"/>
+          <p:cNvSpPr/>
+          <p:nvPr/>
+        </p:nvSpPr>
+        <p:spPr>
+          <a:xfrm>
+            <a:off x="9308592" y="3886200"/>
+            <a:ext cx="2286000" cy="1005840"/>
+          </a:xfrm>
+          <a:prstGeom prst="rect">
+            <a:avLst/>
+          </a:prstGeom>
+          <a:noFill/>
+          <a:ln/>
+        </p:spPr>
+        <p:txBody>
+          <a:bodyPr wrap="square" rtlCol="0" anchor="ctr"/>
+          <a:lstStyle/>
+          <a:p>
+            <a:pPr indent="0" marL="0">
+              <a:buNone/>
+            </a:pPr>
+            <a:r>
+              <a:rPr lang="en-US" sz="1200" dirty="0">
+                <a:solidFill>
+                  <a:srgbClr val="57606A"/>
+                </a:solidFill>
+                <a:latin typeface="Calibri" pitchFamily="34" charset="0"/>
+                <a:ea typeface="Calibri" pitchFamily="34" charset="-122"/>
+                <a:cs typeface="Calibri" pitchFamily="34" charset="-120"/>
+              </a:rPr>
+              <a:t>Integration tests, rate-limit badge, CSV export, error paths, Swagger polish.</a:t>
+            </a:r>
+            <a:endParaRPr lang="en-US" sz="1200" dirty="0"/>
+          </a:p>
+        </p:txBody>
+      </p:sp>
+      <p:sp>
+        <p:nvSpPr>
+          <p:cNvPr id="32" name="Shape 30"/>
+          <p:cNvSpPr/>
+          <p:nvPr/>
+        </p:nvSpPr>
+        <p:spPr>
+          <a:xfrm>
+            <a:off x="9308592" y="5074920"/>
+            <a:ext cx="2194560" cy="0"/>
+          </a:xfrm>
+          <a:prstGeom prst="line">
+            <a:avLst/>
+          </a:prstGeom>
+          <a:noFill/>
+          <a:ln w="12700">
+            <a:solidFill>
+              <a:srgbClr val="E6EAEE"/>
+            </a:solidFill>
+            <a:prstDash val="solid"/>
+          </a:ln>
+        </p:spPr>
+      </p:sp>
+      <p:sp>
+        <p:nvSpPr>
+          <p:cNvPr id="33" name="Text 31"/>
+          <p:cNvSpPr/>
+          <p:nvPr/>
+        </p:nvSpPr>
+        <p:spPr>
+          <a:xfrm>
+            <a:off x="9308592" y="5212080"/>
+            <a:ext cx="2286000" cy="640080"/>
+          </a:xfrm>
+          <a:prstGeom prst="rect">
+            <a:avLst/>
+          </a:prstGeom>
+          <a:noFill/>
+          <a:ln/>
+        </p:spPr>
+        <p:txBody>
+          <a:bodyPr wrap="square" rtlCol="0" anchor="ctr"/>
+          <a:lstStyle/>
+          <a:p>
+            <a:pPr indent="0" marL="0">
+              <a:buNone/>
+            </a:pPr>
+            <a:r>
+              <a:rPr lang="en-US" sz="1000" b="1" dirty="0">
+                <a:solidFill>
+                  <a:srgbClr val="1F6FEB"/>
+                </a:solidFill>
+                <a:latin typeface="Consolas" pitchFamily="34" charset="0"/>
+                <a:ea typeface="Consolas" pitchFamily="34" charset="-122"/>
+                <a:cs typeface="Consolas" pitchFamily="34" charset="-120"/>
+              </a:rPr>
+              <a:t>Week 5</a:t>
+            </a:r>
+            <a:endParaRPr lang="en-US" sz="1000" dirty="0"/>
+          </a:p>
+        </p:txBody>
+      </p:sp>
+      <p:sp>
+        <p:nvSpPr>
+          <p:cNvPr id="34" name="Text 32"/>
+          <p:cNvSpPr/>
+          <p:nvPr/>
+        </p:nvSpPr>
+        <p:spPr>
+          <a:xfrm>
+            <a:off x="548640" y="6446520"/>
+            <a:ext cx="1828800" cy="274320"/>
+          </a:xfrm>
+          <a:prstGeom prst="rect">
+            <a:avLst/>
+          </a:prstGeom>
+          <a:noFill/>
+          <a:ln/>
+        </p:spPr>
+        <p:txBody>
+          <a:bodyPr wrap="square" rtlCol="0" anchor="ctr"/>
+          <a:lstStyle/>
+          <a:p>
+            <a:pPr indent="0" marL="0">
+              <a:buNone/>
+            </a:pPr>
+            <a:r>
+              <a:rPr lang="en-US" sz="900" b="1" spc="400" kern="0" dirty="0">
+                <a:solidFill>
+                  <a:srgbClr val="8B949E"/>
+                </a:solidFill>
+                <a:latin typeface="Consolas" pitchFamily="34" charset="0"/>
+                <a:ea typeface="Consolas" pitchFamily="34" charset="-122"/>
+                <a:cs typeface="Consolas" pitchFamily="34" charset="-120"/>
+              </a:rPr>
+              <a:t>GITSCOUT</a:t>
+            </a:r>
+            <a:endParaRPr lang="en-US" sz="900" dirty="0"/>
+          </a:p>
+        </p:txBody>
+      </p:sp>
+      <p:sp>
+        <p:nvSpPr>
+          <p:cNvPr id="35" name="Text 33"/>
+          <p:cNvSpPr/>
+          <p:nvPr/>
+        </p:nvSpPr>
+        <p:spPr>
+          <a:xfrm>
+            <a:off x="4754880" y="6446520"/>
+            <a:ext cx="2743200" cy="274320"/>
+          </a:xfrm>
+          <a:prstGeom prst="rect">
+            <a:avLst/>
+          </a:prstGeom>
+          <a:noFill/>
+          <a:ln/>
+        </p:spPr>
+        <p:txBody>
+          <a:bodyPr wrap="square" rtlCol="0" anchor="ctr"/>
+          <a:lstStyle/>
+          <a:p>
+            <a:pPr algn="ctr" indent="0" marL="0">
+              <a:buNone/>
+            </a:pPr>
+            <a:r>
+              <a:rPr lang="en-US" sz="900" spc="400" kern="0" dirty="0">
+                <a:solidFill>
+                  <a:srgbClr val="8B949E"/>
+                </a:solidFill>
+                <a:latin typeface="Consolas" pitchFamily="34" charset="0"/>
+                <a:ea typeface="Consolas" pitchFamily="34" charset="-122"/>
+                <a:cs typeface="Consolas" pitchFamily="34" charset="-120"/>
+              </a:rPr>
+              <a:t>TIMELINE</a:t>
+            </a:r>
+            <a:endParaRPr lang="en-US" sz="900" dirty="0"/>
+          </a:p>
+        </p:txBody>
+      </p:sp>
+      <p:sp>
+        <p:nvSpPr>
+          <p:cNvPr id="36" name="Text 34"/>
+          <p:cNvSpPr/>
+          <p:nvPr/>
+        </p:nvSpPr>
+        <p:spPr>
+          <a:xfrm>
+            <a:off x="10698480" y="6446520"/>
+            <a:ext cx="914400" cy="274320"/>
+          </a:xfrm>
+          <a:prstGeom prst="rect">
+            <a:avLst/>
+          </a:prstGeom>
+          <a:noFill/>
+          <a:ln/>
+        </p:spPr>
+        <p:txBody>
+          <a:bodyPr wrap="square" rtlCol="0" anchor="ctr"/>
+          <a:lstStyle/>
+          <a:p>
+            <a:pPr algn="r" indent="0" marL="0">
+              <a:buNone/>
+            </a:pPr>
+            <a:r>
+              <a:rPr lang="en-US" sz="900" b="1" dirty="0">
+                <a:solidFill>
+                  <a:srgbClr val="8B949E"/>
+                </a:solidFill>
+                <a:latin typeface="Consolas" pitchFamily="34" charset="0"/>
+                <a:ea typeface="Consolas" pitchFamily="34" charset="-122"/>
+                <a:cs typeface="Consolas" pitchFamily="34" charset="-120"/>
+              </a:rPr>
+              <a:t>11</a:t>
+            </a:r>
+            <a:endParaRPr lang="en-US" sz="900" dirty="0"/>
+          </a:p>
+        </p:txBody>
+      </p:sp>
+    </p:spTree>
+  </p:cSld>
+  <p:clrMapOvr>
+    <a:masterClrMapping/>
+  </p:clrMapOvr>
+</p:sld>
+</file>
+
+<file path=ppt/slides/slide13.xml><?xml version="1.0" encoding="utf-8"?>
+<p:sld xmlns:a="http://schemas.openxmlformats.org/drawingml/2006/main" xmlns:r="http://schemas.openxmlformats.org/officeDocument/2006/relationships" xmlns:p="http://schemas.openxmlformats.org/presentationml/2006/main">
+  <p:cSld name="Slide 3">
+    <p:bg>
+      <p:bgPr>
+        <a:solidFill>
+          <a:srgbClr val="F6F8FA"/>
+        </a:solidFill>
+      </p:bgPr>
+    </p:bg>
+    <p:spTree>
+      <p:nvGrpSpPr>
+        <p:cNvPr id="1" name=""/>
+        <p:cNvGrpSpPr/>
+        <p:nvPr/>
+      </p:nvGrpSpPr>
+      <p:grpSpPr>
+        <a:xfrm>
+          <a:off x="0" y="0"/>
+          <a:ext cx="0" cy="0"/>
+          <a:chOff x="0" y="0"/>
+          <a:chExt cx="0" cy="0"/>
+        </a:xfrm>
+      </p:grpSpPr>
+      <p:sp>
+        <p:nvSpPr>
+          <p:cNvPr id="2" name="Shape 0"/>
+          <p:cNvSpPr/>
+          <p:nvPr/>
+        </p:nvSpPr>
+        <p:spPr>
+          <a:xfrm>
+            <a:off x="548640" y="621792"/>
+            <a:ext cx="228600" cy="73152"/>
+          </a:xfrm>
+          <a:prstGeom prst="rect">
+            <a:avLst/>
+          </a:prstGeom>
+          <a:solidFill>
+            <a:srgbClr val="1F6FEB"/>
+          </a:solidFill>
+          <a:ln w="12700">
+            <a:solidFill>
+              <a:srgbClr val="1F6FEB"/>
+            </a:solidFill>
+            <a:prstDash val="solid"/>
+          </a:ln>
+        </p:spPr>
+      </p:sp>
+      <p:sp>
+        <p:nvSpPr>
+          <p:cNvPr id="3" name="Text 1"/>
+          <p:cNvSpPr/>
+          <p:nvPr/>
+        </p:nvSpPr>
+        <p:spPr>
+          <a:xfrm>
+            <a:off x="914400" y="548640"/>
+            <a:ext cx="3657600" cy="274320"/>
+          </a:xfrm>
+          <a:prstGeom prst="rect">
+            <a:avLst/>
+          </a:prstGeom>
+          <a:noFill/>
+          <a:ln/>
+        </p:spPr>
+        <p:txBody>
+          <a:bodyPr wrap="square" rtlCol="0" anchor="ctr"/>
+          <a:lstStyle/>
+          <a:p>
+            <a:pPr indent="0" marL="0">
+              <a:buNone/>
+            </a:pPr>
+            <a:r>
+              <a:rPr lang="en-US" sz="1100" b="1" spc="600" kern="0" dirty="0">
+                <a:solidFill>
+                  <a:srgbClr val="57606A"/>
+                </a:solidFill>
+                <a:latin typeface="Consolas" pitchFamily="34" charset="0"/>
+                <a:ea typeface="Consolas" pitchFamily="34" charset="-122"/>
+                <a:cs typeface="Consolas" pitchFamily="34" charset="-120"/>
+              </a:rPr>
+              <a:t>RETROSPECTIVE  11</a:t>
+            </a:r>
+            <a:endParaRPr lang="en-US" sz="1100" dirty="0"/>
+          </a:p>
+        </p:txBody>
+      </p:sp>
+      <p:sp>
+        <p:nvSpPr>
+          <p:cNvPr id="4" name="Text 2"/>
+          <p:cNvSpPr/>
+          <p:nvPr/>
+        </p:nvSpPr>
+        <p:spPr>
+          <a:xfrm>
+            <a:off x="548640" y="1097280"/>
+            <a:ext cx="9144000" cy="1463040"/>
+          </a:xfrm>
+          <a:prstGeom prst="rect">
+            <a:avLst/>
+          </a:prstGeom>
+          <a:noFill/>
+          <a:ln/>
+        </p:spPr>
+        <p:txBody>
+          <a:bodyPr wrap="square" rtlCol="0" anchor="ctr"/>
+          <a:lstStyle/>
+          <a:p>
+            <a:pPr indent="0" marL="0">
+              <a:buNone/>
+            </a:pPr>
+            <a:r>
+              <a:rPr lang="en-US" sz="3600" b="1" dirty="0">
+                <a:solidFill>
+                  <a:srgbClr val="0D1117"/>
+                </a:solidFill>
+                <a:latin typeface="Calibri" pitchFamily="34" charset="0"/>
+                <a:ea typeface="Calibri" pitchFamily="34" charset="-122"/>
+                <a:cs typeface="Calibri" pitchFamily="34" charset="-120"/>
+              </a:rPr>
+              <a:t>Evaluation and</a:t>
+            </a:r>
+            <a:endParaRPr lang="en-US" sz="3600" dirty="0"/>
+          </a:p>
+          <a:p>
+            <a:pPr indent="0" marL="0">
+              <a:buNone/>
+            </a:pPr>
+            <a:r>
+              <a:rPr lang="en-US" sz="3600" b="1" dirty="0">
+                <a:solidFill>
+                  <a:srgbClr val="0D1117"/>
+                </a:solidFill>
+                <a:latin typeface="Calibri" pitchFamily="34" charset="0"/>
+                <a:ea typeface="Calibri" pitchFamily="34" charset="-122"/>
+                <a:cs typeface="Calibri" pitchFamily="34" charset="-120"/>
+              </a:rPr>
+              <a:t>retrospective.</a:t>
+            </a:r>
+            <a:endParaRPr lang="en-US" sz="3600" dirty="0"/>
+          </a:p>
+        </p:txBody>
+      </p:sp>
+      <p:sp>
+        <p:nvSpPr>
+          <p:cNvPr id="5" name="Shape 3"/>
+          <p:cNvSpPr/>
+          <p:nvPr/>
+        </p:nvSpPr>
+        <p:spPr>
+          <a:xfrm>
+            <a:off x="548640" y="2926080"/>
+            <a:ext cx="11091672" cy="1188720"/>
+          </a:xfrm>
+          <a:prstGeom prst="rect">
+            <a:avLst/>
+          </a:prstGeom>
+          <a:solidFill>
+            <a:srgbClr val="FFFFFF"/>
+          </a:solidFill>
+          <a:ln w="12700">
+            <a:solidFill>
+              <a:srgbClr val="D0D7DE"/>
+            </a:solidFill>
+            <a:prstDash val="solid"/>
+          </a:ln>
+        </p:spPr>
+      </p:sp>
+      <p:sp>
+        <p:nvSpPr>
+          <p:cNvPr id="6" name="Text 4"/>
+          <p:cNvSpPr/>
+          <p:nvPr/>
+        </p:nvSpPr>
+        <p:spPr>
+          <a:xfrm>
+            <a:off x="731520" y="3017520"/>
+            <a:ext cx="3474720" cy="640080"/>
+          </a:xfrm>
+          <a:prstGeom prst="rect">
+            <a:avLst/>
+          </a:prstGeom>
+          <a:noFill/>
+          <a:ln/>
+        </p:spPr>
+        <p:txBody>
+          <a:bodyPr wrap="square" rtlCol="0" anchor="ctr"/>
+          <a:lstStyle/>
+          <a:p>
+            <a:pPr indent="0" marL="0">
+              <a:buNone/>
+            </a:pPr>
+            <a:r>
+              <a:rPr lang="en-US" sz="4000" b="1" dirty="0">
+                <a:solidFill>
+                  <a:srgbClr val="1F6FEB"/>
+                </a:solidFill>
+                <a:latin typeface="Calibri" pitchFamily="34" charset="0"/>
+                <a:ea typeface="Calibri" pitchFamily="34" charset="-122"/>
+                <a:cs typeface="Calibri" pitchFamily="34" charset="-120"/>
+              </a:rPr>
+              <a:t>100%</a:t>
+            </a:r>
+            <a:endParaRPr lang="en-US" sz="4000" dirty="0"/>
+          </a:p>
+        </p:txBody>
+      </p:sp>
+      <p:sp>
+        <p:nvSpPr>
+          <p:cNvPr id="7" name="Text 5"/>
+          <p:cNvSpPr/>
+          <p:nvPr/>
+        </p:nvSpPr>
+        <p:spPr>
+          <a:xfrm>
+            <a:off x="731520" y="3657600"/>
+            <a:ext cx="3474720" cy="457200"/>
+          </a:xfrm>
+          <a:prstGeom prst="rect">
+            <a:avLst/>
+          </a:prstGeom>
+          <a:noFill/>
+          <a:ln/>
+        </p:spPr>
+        <p:txBody>
+          <a:bodyPr wrap="square" rtlCol="0" anchor="ctr"/>
+          <a:lstStyle/>
+          <a:p>
+            <a:pPr indent="0" marL="0">
+              <a:buNone/>
+            </a:pPr>
+            <a:r>
+              <a:rPr lang="en-US" sz="1300" dirty="0">
+                <a:solidFill>
+                  <a:srgbClr val="57606A"/>
+                </a:solidFill>
+                <a:latin typeface="Calibri" pitchFamily="34" charset="0"/>
+                <a:ea typeface="Calibri" pitchFamily="34" charset="-122"/>
+                <a:cs typeface="Calibri" pitchFamily="34" charset="-120"/>
+              </a:rPr>
+              <a:t>functional requirements met</a:t>
+            </a:r>
+            <a:endParaRPr lang="en-US" sz="1300" dirty="0"/>
+          </a:p>
+        </p:txBody>
+      </p:sp>
+      <p:sp>
+        <p:nvSpPr>
+          <p:cNvPr id="8" name="Text 6"/>
+          <p:cNvSpPr/>
+          <p:nvPr/>
+        </p:nvSpPr>
+        <p:spPr>
+          <a:xfrm>
+            <a:off x="4389120" y="3017520"/>
+            <a:ext cx="3474720" cy="640080"/>
+          </a:xfrm>
+          <a:prstGeom prst="rect">
+            <a:avLst/>
+          </a:prstGeom>
+          <a:noFill/>
+          <a:ln/>
+        </p:spPr>
+        <p:txBody>
+          <a:bodyPr wrap="square" rtlCol="0" anchor="ctr"/>
+          <a:lstStyle/>
+          <a:p>
+            <a:pPr indent="0" marL="0">
+              <a:buNone/>
+            </a:pPr>
+            <a:r>
+              <a:rPr lang="en-US" sz="4000" b="1" dirty="0">
+                <a:solidFill>
+                  <a:srgbClr val="1F6FEB"/>
+                </a:solidFill>
+                <a:latin typeface="Calibri" pitchFamily="34" charset="0"/>
+                <a:ea typeface="Calibri" pitchFamily="34" charset="-122"/>
+                <a:cs typeface="Calibri" pitchFamily="34" charset="-120"/>
+              </a:rPr>
+              <a:t>12/12</a:t>
+            </a:r>
+            <a:endParaRPr lang="en-US" sz="4000" dirty="0"/>
+          </a:p>
+        </p:txBody>
+      </p:sp>
+      <p:sp>
+        <p:nvSpPr>
+          <p:cNvPr id="9" name="Text 7"/>
+          <p:cNvSpPr/>
+          <p:nvPr/>
+        </p:nvSpPr>
+        <p:spPr>
+          <a:xfrm>
+            <a:off x="4389120" y="3657600"/>
+            <a:ext cx="3474720" cy="457200"/>
+          </a:xfrm>
+          <a:prstGeom prst="rect">
+            <a:avLst/>
+          </a:prstGeom>
+          <a:noFill/>
+          <a:ln/>
+        </p:spPr>
+        <p:txBody>
+          <a:bodyPr wrap="square" rtlCol="0" anchor="ctr"/>
+          <a:lstStyle/>
+          <a:p>
+            <a:pPr indent="0" marL="0">
+              <a:buNone/>
+            </a:pPr>
+            <a:r>
+              <a:rPr lang="en-US" sz="1300" dirty="0">
+                <a:solidFill>
+                  <a:srgbClr val="57606A"/>
+                </a:solidFill>
+                <a:latin typeface="Calibri" pitchFamily="34" charset="0"/>
+                <a:ea typeface="Calibri" pitchFamily="34" charset="-122"/>
+                <a:cs typeface="Calibri" pitchFamily="34" charset="-120"/>
+              </a:rPr>
+              <a:t>server tests passing</a:t>
+            </a:r>
+            <a:endParaRPr lang="en-US" sz="1300" dirty="0"/>
+          </a:p>
+        </p:txBody>
+      </p:sp>
+      <p:sp>
+        <p:nvSpPr>
+          <p:cNvPr id="10" name="Text 8"/>
+          <p:cNvSpPr/>
+          <p:nvPr/>
+        </p:nvSpPr>
+        <p:spPr>
+          <a:xfrm>
+            <a:off x="8046720" y="3017520"/>
+            <a:ext cx="3474720" cy="640080"/>
+          </a:xfrm>
+          <a:prstGeom prst="rect">
+            <a:avLst/>
+          </a:prstGeom>
+          <a:noFill/>
+          <a:ln/>
+        </p:spPr>
+        <p:txBody>
+          <a:bodyPr wrap="square" rtlCol="0" anchor="ctr"/>
+          <a:lstStyle/>
+          <a:p>
+            <a:pPr indent="0" marL="0">
+              <a:buNone/>
+            </a:pPr>
+            <a:r>
+              <a:rPr lang="en-US" sz="4000" b="1" dirty="0">
+                <a:solidFill>
+                  <a:srgbClr val="1F6FEB"/>
+                </a:solidFill>
+                <a:latin typeface="Calibri" pitchFamily="34" charset="0"/>
+                <a:ea typeface="Calibri" pitchFamily="34" charset="-122"/>
+                <a:cs typeface="Calibri" pitchFamily="34" charset="-120"/>
+              </a:rPr>
+              <a:t>0</a:t>
+            </a:r>
+            <a:endParaRPr lang="en-US" sz="4000" dirty="0"/>
+          </a:p>
+        </p:txBody>
+      </p:sp>
+      <p:sp>
+        <p:nvSpPr>
+          <p:cNvPr id="11" name="Text 9"/>
+          <p:cNvSpPr/>
+          <p:nvPr/>
+        </p:nvSpPr>
+        <p:spPr>
+          <a:xfrm>
+            <a:off x="8046720" y="3657600"/>
+            <a:ext cx="3474720" cy="457200"/>
+          </a:xfrm>
+          <a:prstGeom prst="rect">
+            <a:avLst/>
+          </a:prstGeom>
+          <a:noFill/>
+          <a:ln/>
+        </p:spPr>
+        <p:txBody>
+          <a:bodyPr wrap="square" rtlCol="0" anchor="ctr"/>
+          <a:lstStyle/>
+          <a:p>
+            <a:pPr indent="0" marL="0">
+              <a:buNone/>
+            </a:pPr>
+            <a:r>
+              <a:rPr lang="en-US" sz="1300" dirty="0">
+                <a:solidFill>
+                  <a:srgbClr val="57606A"/>
+                </a:solidFill>
+                <a:latin typeface="Calibri" pitchFamily="34" charset="0"/>
+                <a:ea typeface="Calibri" pitchFamily="34" charset="-122"/>
+                <a:cs typeface="Calibri" pitchFamily="34" charset="-120"/>
+              </a:rPr>
+              <a:t>open blocker bugs at v1.0</a:t>
+            </a:r>
+            <a:endParaRPr lang="en-US" sz="1300" dirty="0"/>
+          </a:p>
+        </p:txBody>
+      </p:sp>
+      <p:sp>
+        <p:nvSpPr>
+          <p:cNvPr id="12" name="Shape 10"/>
+          <p:cNvSpPr/>
+          <p:nvPr/>
+        </p:nvSpPr>
+        <p:spPr>
+          <a:xfrm>
+            <a:off x="548640" y="4480560"/>
+            <a:ext cx="3520440" cy="1554480"/>
+          </a:xfrm>
+          <a:prstGeom prst="rect">
+            <a:avLst/>
+          </a:prstGeom>
+          <a:solidFill>
+            <a:srgbClr val="FFFFFF"/>
+          </a:solidFill>
+          <a:ln w="12700">
+            <a:solidFill>
+              <a:srgbClr val="D0D7DE"/>
+            </a:solidFill>
+            <a:prstDash val="solid"/>
+          </a:ln>
+        </p:spPr>
+      </p:sp>
+      <p:sp>
+        <p:nvSpPr>
+          <p:cNvPr id="13" name="Shape 11"/>
+          <p:cNvSpPr/>
+          <p:nvPr/>
+        </p:nvSpPr>
+        <p:spPr>
+          <a:xfrm>
+            <a:off x="777240" y="4617720"/>
+            <a:ext cx="457200" cy="457200"/>
+          </a:xfrm>
+          <a:prstGeom prst="ellipse">
+            <a:avLst/>
+          </a:prstGeom>
+          <a:solidFill>
+            <a:srgbClr val="D29922"/>
+          </a:solidFill>
+          <a:ln w="12700">
+            <a:solidFill>
+              <a:srgbClr val="D29922"/>
+            </a:solidFill>
+            <a:prstDash val="solid"/>
+          </a:ln>
+        </p:spPr>
+      </p:sp>
+      <p:sp>
+        <p:nvSpPr>
+          <p:cNvPr id="14" name="Text 12"/>
+          <p:cNvSpPr/>
+          <p:nvPr/>
+        </p:nvSpPr>
+        <p:spPr>
+          <a:xfrm>
+            <a:off x="777240" y="4617720"/>
+            <a:ext cx="457200" cy="457200"/>
+          </a:xfrm>
+          <a:prstGeom prst="rect">
+            <a:avLst/>
+          </a:prstGeom>
+          <a:noFill/>
+          <a:ln/>
+        </p:spPr>
+        <p:txBody>
+          <a:bodyPr wrap="square" rtlCol="0" anchor="ctr"/>
+          <a:lstStyle/>
+          <a:p>
+            <a:pPr algn="ctr" indent="0" marL="0">
+              <a:buNone/>
+            </a:pPr>
+            <a:r>
+              <a:rPr lang="en-US" sz="1600" b="1" dirty="0">
+                <a:solidFill>
+                  <a:srgbClr val="FFFFFF"/>
+                </a:solidFill>
+                <a:latin typeface="Calibri" pitchFamily="34" charset="0"/>
+                <a:ea typeface="Calibri" pitchFamily="34" charset="-122"/>
+                <a:cs typeface="Calibri" pitchFamily="34" charset="-120"/>
+              </a:rPr>
+              <a:t>★</a:t>
+            </a:r>
+            <a:endParaRPr lang="en-US" sz="1600" dirty="0"/>
+          </a:p>
+        </p:txBody>
+      </p:sp>
+      <p:sp>
+        <p:nvSpPr>
+          <p:cNvPr id="15" name="Text 13"/>
+          <p:cNvSpPr/>
+          <p:nvPr/>
+        </p:nvSpPr>
+        <p:spPr>
+          <a:xfrm>
+            <a:off x="1371600" y="4645152"/>
+            <a:ext cx="2606040" cy="365760"/>
+          </a:xfrm>
+          <a:prstGeom prst="rect">
+            <a:avLst/>
+          </a:prstGeom>
+          <a:noFill/>
+          <a:ln/>
+        </p:spPr>
+        <p:txBody>
+          <a:bodyPr wrap="square" rtlCol="0" anchor="ctr"/>
+          <a:lstStyle/>
+          <a:p>
+            <a:pPr indent="0" marL="0">
+              <a:buNone/>
+            </a:pPr>
+            <a:r>
+              <a:rPr lang="en-US" sz="1400" b="1" dirty="0">
+                <a:solidFill>
+                  <a:srgbClr val="0D1117"/>
+                </a:solidFill>
+                <a:latin typeface="Calibri" pitchFamily="34" charset="0"/>
+                <a:ea typeface="Calibri" pitchFamily="34" charset="-122"/>
+                <a:cs typeface="Calibri" pitchFamily="34" charset="-120"/>
+              </a:rPr>
+              <a:t>Went well</a:t>
+            </a:r>
+            <a:endParaRPr lang="en-US" sz="1400" dirty="0"/>
+          </a:p>
+        </p:txBody>
+      </p:sp>
+      <p:sp>
+        <p:nvSpPr>
+          <p:cNvPr id="16" name="Text 14"/>
+          <p:cNvSpPr/>
+          <p:nvPr/>
+        </p:nvSpPr>
+        <p:spPr>
+          <a:xfrm>
+            <a:off x="777240" y="5166360"/>
+            <a:ext cx="3200400" cy="822960"/>
+          </a:xfrm>
+          <a:prstGeom prst="rect">
+            <a:avLst/>
+          </a:prstGeom>
+          <a:noFill/>
+          <a:ln/>
+        </p:spPr>
+        <p:txBody>
+          <a:bodyPr wrap="square" rtlCol="0" anchor="ctr"/>
+          <a:lstStyle/>
+          <a:p>
+            <a:pPr indent="0" marL="0">
+              <a:buNone/>
+            </a:pPr>
+            <a:r>
+              <a:rPr lang="en-US" sz="1200" dirty="0">
+                <a:solidFill>
+                  <a:srgbClr val="57606A"/>
+                </a:solidFill>
+                <a:latin typeface="Calibri" pitchFamily="34" charset="0"/>
+                <a:ea typeface="Calibri" pitchFamily="34" charset="-122"/>
+                <a:cs typeface="Calibri" pitchFamily="34" charset="-120"/>
+              </a:rPr>
+              <a:t>End-to-end flow shipped against live GitHub. Scope held tight. SRS coverage complete.</a:t>
+            </a:r>
+            <a:endParaRPr lang="en-US" sz="1200" dirty="0"/>
+          </a:p>
+        </p:txBody>
+      </p:sp>
+      <p:sp>
+        <p:nvSpPr>
+          <p:cNvPr id="17" name="Shape 15"/>
+          <p:cNvSpPr/>
+          <p:nvPr/>
+        </p:nvSpPr>
+        <p:spPr>
+          <a:xfrm>
+            <a:off x="4251960" y="4480560"/>
+            <a:ext cx="3520440" cy="1554480"/>
+          </a:xfrm>
+          <a:prstGeom prst="rect">
+            <a:avLst/>
+          </a:prstGeom>
+          <a:solidFill>
+            <a:srgbClr val="FFFFFF"/>
+          </a:solidFill>
+          <a:ln w="12700">
+            <a:solidFill>
+              <a:srgbClr val="D0D7DE"/>
+            </a:solidFill>
+            <a:prstDash val="solid"/>
+          </a:ln>
+        </p:spPr>
+      </p:sp>
+      <p:sp>
+        <p:nvSpPr>
+          <p:cNvPr id="18" name="Shape 16"/>
+          <p:cNvSpPr/>
+          <p:nvPr/>
+        </p:nvSpPr>
+        <p:spPr>
+          <a:xfrm>
+            <a:off x="4480560" y="4617720"/>
+            <a:ext cx="457200" cy="457200"/>
+          </a:xfrm>
+          <a:prstGeom prst="ellipse">
+            <a:avLst/>
+          </a:prstGeom>
+          <a:solidFill>
+            <a:srgbClr val="2DA44E"/>
+          </a:solidFill>
+          <a:ln w="12700">
+            <a:solidFill>
+              <a:srgbClr val="2DA44E"/>
+            </a:solidFill>
+            <a:prstDash val="solid"/>
+          </a:ln>
+        </p:spPr>
+      </p:sp>
+      <p:sp>
+        <p:nvSpPr>
+          <p:cNvPr id="19" name="Text 17"/>
+          <p:cNvSpPr/>
+          <p:nvPr/>
+        </p:nvSpPr>
+        <p:spPr>
+          <a:xfrm>
+            <a:off x="4480560" y="4617720"/>
+            <a:ext cx="457200" cy="457200"/>
+          </a:xfrm>
+          <a:prstGeom prst="rect">
+            <a:avLst/>
+          </a:prstGeom>
+          <a:noFill/>
+          <a:ln/>
+        </p:spPr>
+        <p:txBody>
+          <a:bodyPr wrap="square" rtlCol="0" anchor="ctr"/>
+          <a:lstStyle/>
+          <a:p>
+            <a:pPr algn="ctr" indent="0" marL="0">
+              <a:buNone/>
+            </a:pPr>
+            <a:r>
+              <a:rPr lang="en-US" sz="1600" b="1" dirty="0">
+                <a:solidFill>
+                  <a:srgbClr val="FFFFFF"/>
+                </a:solidFill>
+                <a:latin typeface="Calibri" pitchFamily="34" charset="0"/>
+                <a:ea typeface="Calibri" pitchFamily="34" charset="-122"/>
+                <a:cs typeface="Calibri" pitchFamily="34" charset="-120"/>
+              </a:rPr>
+              <a:t>↑</a:t>
+            </a:r>
+            <a:endParaRPr lang="en-US" sz="1600" dirty="0"/>
+          </a:p>
+        </p:txBody>
+      </p:sp>
+      <p:sp>
+        <p:nvSpPr>
+          <p:cNvPr id="20" name="Text 18"/>
+          <p:cNvSpPr/>
+          <p:nvPr/>
+        </p:nvSpPr>
+        <p:spPr>
+          <a:xfrm>
+            <a:off x="5074920" y="4645152"/>
+            <a:ext cx="2606040" cy="365760"/>
+          </a:xfrm>
+          <a:prstGeom prst="rect">
+            <a:avLst/>
+          </a:prstGeom>
+          <a:noFill/>
+          <a:ln/>
+        </p:spPr>
+        <p:txBody>
+          <a:bodyPr wrap="square" rtlCol="0" anchor="ctr"/>
+          <a:lstStyle/>
+          <a:p>
+            <a:pPr indent="0" marL="0">
+              <a:buNone/>
+            </a:pPr>
+            <a:r>
+              <a:rPr lang="en-US" sz="1400" b="1" dirty="0">
+                <a:solidFill>
+                  <a:srgbClr val="0D1117"/>
+                </a:solidFill>
+                <a:latin typeface="Calibri" pitchFamily="34" charset="0"/>
+                <a:ea typeface="Calibri" pitchFamily="34" charset="-122"/>
+                <a:cs typeface="Calibri" pitchFamily="34" charset="-120"/>
+              </a:rPr>
+              <a:t>Could improve</a:t>
+            </a:r>
+            <a:endParaRPr lang="en-US" sz="1400" dirty="0"/>
+          </a:p>
+        </p:txBody>
+      </p:sp>
+      <p:sp>
+        <p:nvSpPr>
+          <p:cNvPr id="21" name="Text 19"/>
+          <p:cNvSpPr/>
+          <p:nvPr/>
+        </p:nvSpPr>
+        <p:spPr>
+          <a:xfrm>
+            <a:off x="4480560" y="5166360"/>
+            <a:ext cx="3200400" cy="822960"/>
+          </a:xfrm>
+          <a:prstGeom prst="rect">
+            <a:avLst/>
+          </a:prstGeom>
+          <a:noFill/>
+          <a:ln/>
+        </p:spPr>
+        <p:txBody>
+          <a:bodyPr wrap="square" rtlCol="0" anchor="ctr"/>
+          <a:lstStyle/>
+          <a:p>
+            <a:pPr indent="0" marL="0">
+              <a:buNone/>
+            </a:pPr>
+            <a:r>
+              <a:rPr lang="en-US" sz="1200" dirty="0">
+                <a:solidFill>
+                  <a:srgbClr val="57606A"/>
+                </a:solidFill>
+                <a:latin typeface="Calibri" pitchFamily="34" charset="0"/>
+                <a:ea typeface="Calibri" pitchFamily="34" charset="-122"/>
+                <a:cs typeface="Calibri" pitchFamily="34" charset="-120"/>
+              </a:rPr>
+              <a:t>More integration tests across the full flow. Clearer onboarding. Mobile polish.</a:t>
+            </a:r>
+            <a:endParaRPr lang="en-US" sz="1200" dirty="0"/>
+          </a:p>
+        </p:txBody>
+      </p:sp>
+      <p:sp>
+        <p:nvSpPr>
+          <p:cNvPr id="22" name="Shape 20"/>
+          <p:cNvSpPr/>
+          <p:nvPr/>
+        </p:nvSpPr>
+        <p:spPr>
+          <a:xfrm>
+            <a:off x="7955280" y="4480560"/>
+            <a:ext cx="3520440" cy="1554480"/>
+          </a:xfrm>
+          <a:prstGeom prst="rect">
+            <a:avLst/>
+          </a:prstGeom>
+          <a:solidFill>
+            <a:srgbClr val="FFFFFF"/>
+          </a:solidFill>
+          <a:ln w="12700">
+            <a:solidFill>
+              <a:srgbClr val="D0D7DE"/>
+            </a:solidFill>
+            <a:prstDash val="solid"/>
+          </a:ln>
+        </p:spPr>
+      </p:sp>
+      <p:sp>
+        <p:nvSpPr>
+          <p:cNvPr id="23" name="Shape 21"/>
+          <p:cNvSpPr/>
+          <p:nvPr/>
+        </p:nvSpPr>
+        <p:spPr>
+          <a:xfrm>
+            <a:off x="8183880" y="4617720"/>
+            <a:ext cx="457200" cy="457200"/>
+          </a:xfrm>
+          <a:prstGeom prst="ellipse">
+            <a:avLst/>
+          </a:prstGeom>
+          <a:solidFill>
+            <a:srgbClr val="2EA7A5"/>
+          </a:solidFill>
+          <a:ln w="12700">
+            <a:solidFill>
+              <a:srgbClr val="2EA7A5"/>
+            </a:solidFill>
+            <a:prstDash val="solid"/>
+          </a:ln>
+        </p:spPr>
+      </p:sp>
+      <p:sp>
+        <p:nvSpPr>
+          <p:cNvPr id="24" name="Text 22"/>
+          <p:cNvSpPr/>
+          <p:nvPr/>
+        </p:nvSpPr>
+        <p:spPr>
+          <a:xfrm>
+            <a:off x="8183880" y="4617720"/>
+            <a:ext cx="457200" cy="457200"/>
+          </a:xfrm>
+          <a:prstGeom prst="rect">
+            <a:avLst/>
+          </a:prstGeom>
+          <a:noFill/>
+          <a:ln/>
+        </p:spPr>
+        <p:txBody>
+          <a:bodyPr wrap="square" rtlCol="0" anchor="ctr"/>
+          <a:lstStyle/>
+          <a:p>
+            <a:pPr algn="ctr" indent="0" marL="0">
+              <a:buNone/>
+            </a:pPr>
+            <a:r>
+              <a:rPr lang="en-US" sz="1600" b="1" dirty="0">
+                <a:solidFill>
+                  <a:srgbClr val="FFFFFF"/>
+                </a:solidFill>
+                <a:latin typeface="Calibri" pitchFamily="34" charset="0"/>
+                <a:ea typeface="Calibri" pitchFamily="34" charset="-122"/>
+                <a:cs typeface="Calibri" pitchFamily="34" charset="-120"/>
+              </a:rPr>
+              <a:t>✓</a:t>
+            </a:r>
+            <a:endParaRPr lang="en-US" sz="1600" dirty="0"/>
+          </a:p>
+        </p:txBody>
+      </p:sp>
+      <p:sp>
+        <p:nvSpPr>
+          <p:cNvPr id="25" name="Text 23"/>
+          <p:cNvSpPr/>
+          <p:nvPr/>
+        </p:nvSpPr>
+        <p:spPr>
+          <a:xfrm>
+            <a:off x="8778240" y="4645152"/>
+            <a:ext cx="2606040" cy="365760"/>
+          </a:xfrm>
+          <a:prstGeom prst="rect">
+            <a:avLst/>
+          </a:prstGeom>
+          <a:noFill/>
+          <a:ln/>
+        </p:spPr>
+        <p:txBody>
+          <a:bodyPr wrap="square" rtlCol="0" anchor="ctr"/>
+          <a:lstStyle/>
+          <a:p>
+            <a:pPr indent="0" marL="0">
+              <a:buNone/>
+            </a:pPr>
+            <a:r>
+              <a:rPr lang="en-US" sz="1400" b="1" dirty="0">
+                <a:solidFill>
+                  <a:srgbClr val="0D1117"/>
+                </a:solidFill>
+                <a:latin typeface="Calibri" pitchFamily="34" charset="0"/>
+                <a:ea typeface="Calibri" pitchFamily="34" charset="-122"/>
+                <a:cs typeface="Calibri" pitchFamily="34" charset="-120"/>
+              </a:rPr>
+              <a:t>Open risks</a:t>
+            </a:r>
+            <a:endParaRPr lang="en-US" sz="1400" dirty="0"/>
+          </a:p>
+        </p:txBody>
+      </p:sp>
+      <p:sp>
+        <p:nvSpPr>
+          <p:cNvPr id="26" name="Text 24"/>
+          <p:cNvSpPr/>
+          <p:nvPr/>
+        </p:nvSpPr>
+        <p:spPr>
+          <a:xfrm>
+            <a:off x="8183880" y="5166360"/>
+            <a:ext cx="3200400" cy="822960"/>
+          </a:xfrm>
+          <a:prstGeom prst="rect">
+            <a:avLst/>
+          </a:prstGeom>
+          <a:noFill/>
+          <a:ln/>
+        </p:spPr>
+        <p:txBody>
+          <a:bodyPr wrap="square" rtlCol="0" anchor="ctr"/>
+          <a:lstStyle/>
+          <a:p>
+            <a:pPr indent="0" marL="0">
+              <a:buNone/>
+            </a:pPr>
+            <a:r>
+              <a:rPr lang="en-US" sz="1200" dirty="0">
+                <a:solidFill>
+                  <a:srgbClr val="57606A"/>
+                </a:solidFill>
+                <a:latin typeface="Calibri" pitchFamily="34" charset="0"/>
+                <a:ea typeface="Calibri" pitchFamily="34" charset="-122"/>
+                <a:cs typeface="Calibri" pitchFamily="34" charset="-120"/>
+              </a:rPr>
+              <a:t>GitHub rate limits at scale. No pagination past first page. SQLite is single-node.</a:t>
+            </a:r>
+            <a:endParaRPr lang="en-US" sz="1200" dirty="0"/>
+          </a:p>
+        </p:txBody>
+      </p:sp>
+      <p:sp>
+        <p:nvSpPr>
+          <p:cNvPr id="27" name="Text 25"/>
+          <p:cNvSpPr/>
+          <p:nvPr/>
+        </p:nvSpPr>
+        <p:spPr>
+          <a:xfrm>
+            <a:off x="548640" y="6446520"/>
+            <a:ext cx="1828800" cy="274320"/>
+          </a:xfrm>
+          <a:prstGeom prst="rect">
+            <a:avLst/>
+          </a:prstGeom>
+          <a:noFill/>
+          <a:ln/>
+        </p:spPr>
+        <p:txBody>
+          <a:bodyPr wrap="square" rtlCol="0" anchor="ctr"/>
+          <a:lstStyle/>
+          <a:p>
+            <a:pPr indent="0" marL="0">
+              <a:buNone/>
+            </a:pPr>
+            <a:r>
+              <a:rPr lang="en-US" sz="900" b="1" spc="400" kern="0" dirty="0">
+                <a:solidFill>
+                  <a:srgbClr val="8B949E"/>
+                </a:solidFill>
+                <a:latin typeface="Consolas" pitchFamily="34" charset="0"/>
+                <a:ea typeface="Consolas" pitchFamily="34" charset="-122"/>
+                <a:cs typeface="Consolas" pitchFamily="34" charset="-120"/>
+              </a:rPr>
+              <a:t>GITSCOUT</a:t>
+            </a:r>
+            <a:endParaRPr lang="en-US" sz="900" dirty="0"/>
+          </a:p>
+        </p:txBody>
+      </p:sp>
+      <p:sp>
+        <p:nvSpPr>
+          <p:cNvPr id="28" name="Text 26"/>
+          <p:cNvSpPr/>
+          <p:nvPr/>
+        </p:nvSpPr>
+        <p:spPr>
+          <a:xfrm>
+            <a:off x="4754880" y="6446520"/>
+            <a:ext cx="2743200" cy="274320"/>
+          </a:xfrm>
+          <a:prstGeom prst="rect">
+            <a:avLst/>
+          </a:prstGeom>
+          <a:noFill/>
+          <a:ln/>
+        </p:spPr>
+        <p:txBody>
+          <a:bodyPr wrap="square" rtlCol="0" anchor="ctr"/>
+          <a:lstStyle/>
+          <a:p>
+            <a:pPr algn="ctr" indent="0" marL="0">
+              <a:buNone/>
+            </a:pPr>
+            <a:r>
+              <a:rPr lang="en-US" sz="900" spc="400" kern="0" dirty="0">
+                <a:solidFill>
+                  <a:srgbClr val="8B949E"/>
+                </a:solidFill>
+                <a:latin typeface="Consolas" pitchFamily="34" charset="0"/>
+                <a:ea typeface="Consolas" pitchFamily="34" charset="-122"/>
+                <a:cs typeface="Consolas" pitchFamily="34" charset="-120"/>
+              </a:rPr>
+              <a:t>RETROSPECTIVE</a:t>
+            </a:r>
+            <a:endParaRPr lang="en-US" sz="900" dirty="0"/>
+          </a:p>
+        </p:txBody>
+      </p:sp>
+      <p:sp>
+        <p:nvSpPr>
+          <p:cNvPr id="29" name="Text 27"/>
+          <p:cNvSpPr/>
+          <p:nvPr/>
+        </p:nvSpPr>
+        <p:spPr>
+          <a:xfrm>
+            <a:off x="10698480" y="6446520"/>
+            <a:ext cx="914400" cy="274320"/>
+          </a:xfrm>
+          <a:prstGeom prst="rect">
+            <a:avLst/>
+          </a:prstGeom>
+          <a:noFill/>
+          <a:ln/>
+        </p:spPr>
+        <p:txBody>
+          <a:bodyPr wrap="square" rtlCol="0" anchor="ctr"/>
+          <a:lstStyle/>
+          <a:p>
+            <a:pPr algn="r" indent="0" marL="0">
+              <a:buNone/>
+            </a:pPr>
+            <a:r>
+              <a:rPr lang="en-US" sz="900" b="1" dirty="0">
+                <a:solidFill>
+                  <a:srgbClr val="8B949E"/>
+                </a:solidFill>
+                <a:latin typeface="Consolas" pitchFamily="34" charset="0"/>
+                <a:ea typeface="Consolas" pitchFamily="34" charset="-122"/>
+                <a:cs typeface="Consolas" pitchFamily="34" charset="-120"/>
+              </a:rPr>
+              <a:t>12</a:t>
+            </a:r>
+            <a:endParaRPr lang="en-US" sz="900" dirty="0"/>
+          </a:p>
+        </p:txBody>
+      </p:sp>
+    </p:spTree>
+  </p:cSld>
+  <p:clrMapOvr>
+    <a:masterClrMapping/>
+  </p:clrMapOvr>
+</p:sld>
+</file>
+
+<file path=ppt/slides/slide14.xml><?xml version="1.0" encoding="utf-8"?>
+<p:sld xmlns:a="http://schemas.openxmlformats.org/drawingml/2006/main" xmlns:r="http://schemas.openxmlformats.org/officeDocument/2006/relationships" xmlns:p="http://schemas.openxmlformats.org/presentationml/2006/main">
+  <p:cSld name="Slide 10">
+    <p:bg>
+      <p:bgPr>
+        <a:solidFill>
+          <a:srgbClr val="0D1117"/>
+        </a:solidFill>
+      </p:bgPr>
+    </p:bg>
+    <p:spTree>
+      <p:nvGrpSpPr>
+        <p:cNvPr id="1" name=""/>
+        <p:cNvGrpSpPr/>
+        <p:nvPr/>
+      </p:nvGrpSpPr>
+      <p:grpSpPr>
+        <a:xfrm>
+          <a:off x="0" y="0"/>
+          <a:ext cx="0" cy="0"/>
+          <a:chOff x="0" y="0"/>
+          <a:chExt cx="0" cy="0"/>
+        </a:xfrm>
+      </p:grpSpPr>
+      <p:sp>
+        <p:nvSpPr>
+          <p:cNvPr id="2" name="Shape 0"/>
+          <p:cNvSpPr/>
+          <p:nvPr/>
+        </p:nvSpPr>
+        <p:spPr>
+          <a:xfrm>
+            <a:off x="548640" y="621792"/>
+            <a:ext cx="228600" cy="73152"/>
+          </a:xfrm>
+          <a:prstGeom prst="rect">
+            <a:avLst/>
+          </a:prstGeom>
+          <a:solidFill>
+            <a:srgbClr val="1F6FEB"/>
+          </a:solidFill>
+          <a:ln w="12700">
+            <a:solidFill>
+              <a:srgbClr val="1F6FEB"/>
+            </a:solidFill>
+            <a:prstDash val="solid"/>
+          </a:ln>
+        </p:spPr>
+      </p:sp>
+      <p:sp>
+        <p:nvSpPr>
+          <p:cNvPr id="3" name="Text 1"/>
+          <p:cNvSpPr/>
+          <p:nvPr/>
+        </p:nvSpPr>
+        <p:spPr>
+          <a:xfrm>
+            <a:off x="914400" y="548640"/>
+            <a:ext cx="3657600" cy="274320"/>
+          </a:xfrm>
+          <a:prstGeom prst="rect">
+            <a:avLst/>
+          </a:prstGeom>
+          <a:noFill/>
+          <a:ln/>
+        </p:spPr>
+        <p:txBody>
+          <a:bodyPr wrap="square" rtlCol="0" anchor="ctr"/>
+          <a:lstStyle/>
+          <a:p>
+            <a:pPr indent="0" marL="0">
+              <a:buNone/>
+            </a:pPr>
+            <a:r>
+              <a:rPr lang="en-US" sz="1100" b="1" spc="600" kern="0" dirty="0">
+                <a:solidFill>
+                  <a:srgbClr val="8B949E"/>
+                </a:solidFill>
+                <a:latin typeface="Consolas" pitchFamily="34" charset="0"/>
+                <a:ea typeface="Consolas" pitchFamily="34" charset="-122"/>
+                <a:cs typeface="Consolas" pitchFamily="34" charset="-120"/>
+              </a:rPr>
+              <a:t>LESSONS  12</a:t>
+            </a:r>
+            <a:endParaRPr lang="en-US" sz="1100" dirty="0"/>
+          </a:p>
+        </p:txBody>
+      </p:sp>
+      <p:sp>
+        <p:nvSpPr>
+          <p:cNvPr id="4" name="Text 2"/>
+          <p:cNvSpPr/>
+          <p:nvPr/>
+        </p:nvSpPr>
+        <p:spPr>
+          <a:xfrm>
+            <a:off x="548640" y="1005840"/>
+            <a:ext cx="9144000" cy="914400"/>
+          </a:xfrm>
+          <a:prstGeom prst="rect">
+            <a:avLst/>
+          </a:prstGeom>
+          <a:noFill/>
+          <a:ln/>
+        </p:spPr>
+        <p:txBody>
+          <a:bodyPr wrap="square" rtlCol="0" anchor="ctr"/>
+          <a:lstStyle/>
+          <a:p>
+            <a:pPr indent="0" marL="0">
+              <a:buNone/>
+            </a:pPr>
+            <a:r>
+              <a:rPr lang="en-US" sz="4000" b="1" dirty="0">
+                <a:solidFill>
+                  <a:srgbClr val="FFFFFF"/>
+                </a:solidFill>
+                <a:latin typeface="Calibri" pitchFamily="34" charset="0"/>
+                <a:ea typeface="Calibri" pitchFamily="34" charset="-122"/>
+                <a:cs typeface="Calibri" pitchFamily="34" charset="-120"/>
+              </a:rPr>
+              <a:t>Lessons Learned.</a:t>
+            </a:r>
+            <a:endParaRPr lang="en-US" sz="4000" dirty="0"/>
+          </a:p>
+        </p:txBody>
+      </p:sp>
+      <p:sp>
+        <p:nvSpPr>
+          <p:cNvPr id="5" name="Text 3"/>
+          <p:cNvSpPr/>
+          <p:nvPr/>
+        </p:nvSpPr>
+        <p:spPr>
+          <a:xfrm>
+            <a:off x="548640" y="1874520"/>
+            <a:ext cx="10972800" cy="457200"/>
+          </a:xfrm>
+          <a:prstGeom prst="rect">
+            <a:avLst/>
+          </a:prstGeom>
+          <a:noFill/>
+          <a:ln/>
+        </p:spPr>
+        <p:txBody>
+          <a:bodyPr wrap="square" rtlCol="0" anchor="ctr"/>
+          <a:lstStyle/>
+          <a:p>
+            <a:pPr indent="0" marL="0">
+              <a:buNone/>
+            </a:pPr>
+            <a:r>
+              <a:rPr lang="en-US" sz="1600" dirty="0">
+                <a:solidFill>
+                  <a:srgbClr val="C9D1D9"/>
+                </a:solidFill>
+                <a:latin typeface="Calibri" pitchFamily="34" charset="0"/>
+                <a:ea typeface="Calibri" pitchFamily="34" charset="-122"/>
+                <a:cs typeface="Calibri" pitchFamily="34" charset="-120"/>
+              </a:rPr>
+              <a:t>Takeaways we carry into v2 — process and technical.</a:t>
+            </a:r>
+            <a:endParaRPr lang="en-US" sz="1600" dirty="0"/>
+          </a:p>
+        </p:txBody>
+      </p:sp>
+      <p:sp>
+        <p:nvSpPr>
+          <p:cNvPr id="6" name="Shape 4"/>
+          <p:cNvSpPr/>
+          <p:nvPr/>
+        </p:nvSpPr>
+        <p:spPr>
+          <a:xfrm>
+            <a:off x="548640" y="2743200"/>
+            <a:ext cx="11091672" cy="548640"/>
+          </a:xfrm>
+          <a:prstGeom prst="rect">
+            <a:avLst/>
+          </a:prstGeom>
+          <a:solidFill>
+            <a:srgbClr val="161B22"/>
+          </a:solidFill>
+          <a:ln w="12700">
+            <a:solidFill>
+              <a:srgbClr val="30363D"/>
+            </a:solidFill>
+            <a:prstDash val="solid"/>
+          </a:ln>
+        </p:spPr>
+      </p:sp>
+      <p:sp>
+        <p:nvSpPr>
+          <p:cNvPr id="7" name="Text 5"/>
+          <p:cNvSpPr/>
+          <p:nvPr/>
+        </p:nvSpPr>
+        <p:spPr>
+          <a:xfrm>
+            <a:off x="777240" y="2816352"/>
+            <a:ext cx="457200" cy="411480"/>
+          </a:xfrm>
+          <a:prstGeom prst="rect">
+            <a:avLst/>
+          </a:prstGeom>
+          <a:noFill/>
+          <a:ln/>
+        </p:spPr>
+        <p:txBody>
+          <a:bodyPr wrap="square" rtlCol="0" anchor="ctr"/>
+          <a:lstStyle/>
+          <a:p>
+            <a:pPr indent="0" marL="0">
+              <a:buNone/>
+            </a:pPr>
+            <a:r>
+              <a:rPr lang="en-US" sz="2000" b="1" dirty="0">
+                <a:solidFill>
+                  <a:srgbClr val="1F6FEB"/>
+                </a:solidFill>
+                <a:latin typeface="Calibri" pitchFamily="34" charset="0"/>
+                <a:ea typeface="Calibri" pitchFamily="34" charset="-122"/>
+                <a:cs typeface="Calibri" pitchFamily="34" charset="-120"/>
+              </a:rPr>
+              <a:t>→</a:t>
+            </a:r>
+            <a:endParaRPr lang="en-US" sz="2000" dirty="0"/>
+          </a:p>
+        </p:txBody>
+      </p:sp>
+      <p:sp>
+        <p:nvSpPr>
+          <p:cNvPr id="8" name="Text 6"/>
+          <p:cNvSpPr/>
+          <p:nvPr/>
+        </p:nvSpPr>
+        <p:spPr>
+          <a:xfrm>
+            <a:off x="1280160" y="2852928"/>
+            <a:ext cx="3474720" cy="365760"/>
+          </a:xfrm>
+          <a:prstGeom prst="rect">
+            <a:avLst/>
+          </a:prstGeom>
+          <a:noFill/>
+          <a:ln/>
+        </p:spPr>
+        <p:txBody>
+          <a:bodyPr wrap="square" rtlCol="0" anchor="ctr"/>
+          <a:lstStyle/>
+          <a:p>
+            <a:pPr indent="0" marL="0">
+              <a:buNone/>
+            </a:pPr>
+            <a:r>
+              <a:rPr lang="en-US" sz="1500" b="1" dirty="0">
+                <a:solidFill>
+                  <a:srgbClr val="FFFFFF"/>
+                </a:solidFill>
+                <a:latin typeface="Calibri" pitchFamily="34" charset="0"/>
+                <a:ea typeface="Calibri" pitchFamily="34" charset="-122"/>
+                <a:cs typeface="Calibri" pitchFamily="34" charset="-120"/>
+              </a:rPr>
+              <a:t>Transparent beats complex</a:t>
+            </a:r>
+            <a:endParaRPr lang="en-US" sz="1500" dirty="0"/>
+          </a:p>
+        </p:txBody>
+      </p:sp>
+      <p:sp>
+        <p:nvSpPr>
+          <p:cNvPr id="9" name="Text 7"/>
+          <p:cNvSpPr/>
+          <p:nvPr/>
+        </p:nvSpPr>
+        <p:spPr>
+          <a:xfrm>
+            <a:off x="4937760" y="2852928"/>
+            <a:ext cx="6492240" cy="365760"/>
+          </a:xfrm>
+          <a:prstGeom prst="rect">
+            <a:avLst/>
+          </a:prstGeom>
+          <a:noFill/>
+          <a:ln/>
+        </p:spPr>
+        <p:txBody>
+          <a:bodyPr wrap="square" rtlCol="0" anchor="ctr"/>
+          <a:lstStyle/>
+          <a:p>
+            <a:pPr indent="0" marL="0">
+              <a:buNone/>
+            </a:pPr>
+            <a:r>
+              <a:rPr lang="en-US" sz="1300" dirty="0">
+                <a:solidFill>
+                  <a:srgbClr val="C9D1D9"/>
+                </a:solidFill>
+                <a:latin typeface="Calibri" pitchFamily="34" charset="0"/>
+                <a:ea typeface="Calibri" pitchFamily="34" charset="-122"/>
+                <a:cs typeface="Calibri" pitchFamily="34" charset="-120"/>
+              </a:rPr>
+              <a:t>Users trust a weighted sum they can see. A visible formula beat a black-box score, every time.</a:t>
+            </a:r>
+            <a:endParaRPr lang="en-US" sz="1300" dirty="0"/>
+          </a:p>
+        </p:txBody>
+      </p:sp>
+      <p:sp>
+        <p:nvSpPr>
+          <p:cNvPr id="10" name="Shape 8"/>
+          <p:cNvSpPr/>
+          <p:nvPr/>
+        </p:nvSpPr>
+        <p:spPr>
+          <a:xfrm>
+            <a:off x="548640" y="3383280"/>
+            <a:ext cx="11091672" cy="548640"/>
+          </a:xfrm>
+          <a:prstGeom prst="rect">
+            <a:avLst/>
+          </a:prstGeom>
+          <a:solidFill>
+            <a:srgbClr val="161B22"/>
+          </a:solidFill>
+          <a:ln w="12700">
+            <a:solidFill>
+              <a:srgbClr val="30363D"/>
+            </a:solidFill>
+            <a:prstDash val="solid"/>
+          </a:ln>
+        </p:spPr>
+      </p:sp>
+      <p:sp>
+        <p:nvSpPr>
+          <p:cNvPr id="11" name="Text 9"/>
+          <p:cNvSpPr/>
+          <p:nvPr/>
+        </p:nvSpPr>
+        <p:spPr>
+          <a:xfrm>
+            <a:off x="777240" y="3456432"/>
+            <a:ext cx="457200" cy="411480"/>
+          </a:xfrm>
+          <a:prstGeom prst="rect">
+            <a:avLst/>
+          </a:prstGeom>
+          <a:noFill/>
+          <a:ln/>
+        </p:spPr>
+        <p:txBody>
+          <a:bodyPr wrap="square" rtlCol="0" anchor="ctr"/>
+          <a:lstStyle/>
+          <a:p>
+            <a:pPr indent="0" marL="0">
+              <a:buNone/>
+            </a:pPr>
+            <a:r>
+              <a:rPr lang="en-US" sz="2000" b="1" dirty="0">
+                <a:solidFill>
+                  <a:srgbClr val="1F6FEB"/>
+                </a:solidFill>
+                <a:latin typeface="Calibri" pitchFamily="34" charset="0"/>
+                <a:ea typeface="Calibri" pitchFamily="34" charset="-122"/>
+                <a:cs typeface="Calibri" pitchFamily="34" charset="-120"/>
+              </a:rPr>
+              <a:t>→</a:t>
+            </a:r>
+            <a:endParaRPr lang="en-US" sz="2000" dirty="0"/>
+          </a:p>
+        </p:txBody>
+      </p:sp>
+      <p:sp>
+        <p:nvSpPr>
+          <p:cNvPr id="12" name="Text 10"/>
+          <p:cNvSpPr/>
+          <p:nvPr/>
+        </p:nvSpPr>
+        <p:spPr>
+          <a:xfrm>
+            <a:off x="1280160" y="3493008"/>
+            <a:ext cx="3474720" cy="365760"/>
+          </a:xfrm>
+          <a:prstGeom prst="rect">
+            <a:avLst/>
+          </a:prstGeom>
+          <a:noFill/>
+          <a:ln/>
+        </p:spPr>
+        <p:txBody>
+          <a:bodyPr wrap="square" rtlCol="0" anchor="ctr"/>
+          <a:lstStyle/>
+          <a:p>
+            <a:pPr indent="0" marL="0">
+              <a:buNone/>
+            </a:pPr>
+            <a:r>
+              <a:rPr lang="en-US" sz="1500" b="1" dirty="0">
+                <a:solidFill>
+                  <a:srgbClr val="FFFFFF"/>
+                </a:solidFill>
+                <a:latin typeface="Calibri" pitchFamily="34" charset="0"/>
+                <a:ea typeface="Calibri" pitchFamily="34" charset="-122"/>
+                <a:cs typeface="Calibri" pitchFamily="34" charset="-120"/>
+              </a:rPr>
+              <a:t>Ship the API first</a:t>
+            </a:r>
+            <a:endParaRPr lang="en-US" sz="1500" dirty="0"/>
+          </a:p>
+        </p:txBody>
+      </p:sp>
+      <p:sp>
+        <p:nvSpPr>
+          <p:cNvPr id="13" name="Text 11"/>
+          <p:cNvSpPr/>
+          <p:nvPr/>
+        </p:nvSpPr>
+        <p:spPr>
+          <a:xfrm>
+            <a:off x="4937760" y="3493008"/>
+            <a:ext cx="6492240" cy="365760"/>
+          </a:xfrm>
+          <a:prstGeom prst="rect">
+            <a:avLst/>
+          </a:prstGeom>
+          <a:noFill/>
+          <a:ln/>
+        </p:spPr>
+        <p:txBody>
+          <a:bodyPr wrap="square" rtlCol="0" anchor="ctr"/>
+          <a:lstStyle/>
+          <a:p>
+            <a:pPr indent="0" marL="0">
+              <a:buNone/>
+            </a:pPr>
+            <a:r>
+              <a:rPr lang="en-US" sz="1300" dirty="0">
+                <a:solidFill>
+                  <a:srgbClr val="C9D1D9"/>
+                </a:solidFill>
+                <a:latin typeface="Calibri" pitchFamily="34" charset="0"/>
+                <a:ea typeface="Calibri" pitchFamily="34" charset="-122"/>
+                <a:cs typeface="Calibri" pitchFamily="34" charset="-120"/>
+              </a:rPr>
+              <a:t>Nailing the API contract in week 2 let scoring and UI work lock-step without churn.</a:t>
+            </a:r>
+            <a:endParaRPr lang="en-US" sz="1300" dirty="0"/>
+          </a:p>
+        </p:txBody>
+      </p:sp>
+      <p:sp>
+        <p:nvSpPr>
+          <p:cNvPr id="14" name="Shape 12"/>
+          <p:cNvSpPr/>
+          <p:nvPr/>
+        </p:nvSpPr>
+        <p:spPr>
+          <a:xfrm>
+            <a:off x="548640" y="4023360"/>
+            <a:ext cx="11091672" cy="548640"/>
+          </a:xfrm>
+          <a:prstGeom prst="rect">
+            <a:avLst/>
+          </a:prstGeom>
+          <a:solidFill>
+            <a:srgbClr val="161B22"/>
+          </a:solidFill>
+          <a:ln w="12700">
+            <a:solidFill>
+              <a:srgbClr val="30363D"/>
+            </a:solidFill>
+            <a:prstDash val="solid"/>
+          </a:ln>
+        </p:spPr>
+      </p:sp>
+      <p:sp>
+        <p:nvSpPr>
+          <p:cNvPr id="15" name="Text 13"/>
+          <p:cNvSpPr/>
+          <p:nvPr/>
+        </p:nvSpPr>
+        <p:spPr>
+          <a:xfrm>
+            <a:off x="777240" y="4096512"/>
+            <a:ext cx="457200" cy="411480"/>
+          </a:xfrm>
+          <a:prstGeom prst="rect">
+            <a:avLst/>
+          </a:prstGeom>
+          <a:noFill/>
+          <a:ln/>
+        </p:spPr>
+        <p:txBody>
+          <a:bodyPr wrap="square" rtlCol="0" anchor="ctr"/>
+          <a:lstStyle/>
+          <a:p>
+            <a:pPr indent="0" marL="0">
+              <a:buNone/>
+            </a:pPr>
+            <a:r>
+              <a:rPr lang="en-US" sz="2000" b="1" dirty="0">
+                <a:solidFill>
+                  <a:srgbClr val="1F6FEB"/>
+                </a:solidFill>
+                <a:latin typeface="Calibri" pitchFamily="34" charset="0"/>
+                <a:ea typeface="Calibri" pitchFamily="34" charset="-122"/>
+                <a:cs typeface="Calibri" pitchFamily="34" charset="-120"/>
+              </a:rPr>
+              <a:t>→</a:t>
+            </a:r>
+            <a:endParaRPr lang="en-US" sz="2000" dirty="0"/>
+          </a:p>
+        </p:txBody>
+      </p:sp>
+      <p:sp>
+        <p:nvSpPr>
+          <p:cNvPr id="16" name="Text 14"/>
+          <p:cNvSpPr/>
+          <p:nvPr/>
+        </p:nvSpPr>
+        <p:spPr>
+          <a:xfrm>
+            <a:off x="1280160" y="4133088"/>
+            <a:ext cx="3474720" cy="365760"/>
+          </a:xfrm>
+          <a:prstGeom prst="rect">
+            <a:avLst/>
+          </a:prstGeom>
+          <a:noFill/>
+          <a:ln/>
+        </p:spPr>
+        <p:txBody>
+          <a:bodyPr wrap="square" rtlCol="0" anchor="ctr"/>
+          <a:lstStyle/>
+          <a:p>
+            <a:pPr indent="0" marL="0">
+              <a:buNone/>
+            </a:pPr>
+            <a:r>
+              <a:rPr lang="en-US" sz="1500" b="1" dirty="0">
+                <a:solidFill>
+                  <a:srgbClr val="FFFFFF"/>
+                </a:solidFill>
+                <a:latin typeface="Calibri" pitchFamily="34" charset="0"/>
+                <a:ea typeface="Calibri" pitchFamily="34" charset="-122"/>
+                <a:cs typeface="Calibri" pitchFamily="34" charset="-120"/>
+              </a:rPr>
+              <a:t>Cache early</a:t>
+            </a:r>
+            <a:endParaRPr lang="en-US" sz="1500" dirty="0"/>
+          </a:p>
+        </p:txBody>
+      </p:sp>
+      <p:sp>
+        <p:nvSpPr>
+          <p:cNvPr id="17" name="Text 15"/>
+          <p:cNvSpPr/>
+          <p:nvPr/>
+        </p:nvSpPr>
+        <p:spPr>
+          <a:xfrm>
+            <a:off x="4937760" y="4133088"/>
+            <a:ext cx="6492240" cy="365760"/>
+          </a:xfrm>
+          <a:prstGeom prst="rect">
+            <a:avLst/>
+          </a:prstGeom>
+          <a:noFill/>
+          <a:ln/>
+        </p:spPr>
+        <p:txBody>
+          <a:bodyPr wrap="square" rtlCol="0" anchor="ctr"/>
+          <a:lstStyle/>
+          <a:p>
+            <a:pPr indent="0" marL="0">
+              <a:buNone/>
+            </a:pPr>
+            <a:r>
+              <a:rPr lang="en-US" sz="1300" dirty="0">
+                <a:solidFill>
+                  <a:srgbClr val="C9D1D9"/>
+                </a:solidFill>
+                <a:latin typeface="Calibri" pitchFamily="34" charset="0"/>
+                <a:ea typeface="Calibri" pitchFamily="34" charset="-122"/>
+                <a:cs typeface="Calibri" pitchFamily="34" charset="-120"/>
+              </a:rPr>
+              <a:t>The 5-minute profile cache cut GitHub rate-limit errors to zero during demos.</a:t>
+            </a:r>
+            <a:endParaRPr lang="en-US" sz="1300" dirty="0"/>
+          </a:p>
+        </p:txBody>
+      </p:sp>
+      <p:sp>
+        <p:nvSpPr>
+          <p:cNvPr id="18" name="Shape 16"/>
+          <p:cNvSpPr/>
+          <p:nvPr/>
+        </p:nvSpPr>
+        <p:spPr>
+          <a:xfrm>
+            <a:off x="548640" y="4663440"/>
+            <a:ext cx="11091672" cy="548640"/>
+          </a:xfrm>
+          <a:prstGeom prst="rect">
+            <a:avLst/>
+          </a:prstGeom>
+          <a:solidFill>
+            <a:srgbClr val="161B22"/>
+          </a:solidFill>
+          <a:ln w="12700">
+            <a:solidFill>
+              <a:srgbClr val="30363D"/>
+            </a:solidFill>
+            <a:prstDash val="solid"/>
+          </a:ln>
+        </p:spPr>
+      </p:sp>
+      <p:sp>
+        <p:nvSpPr>
+          <p:cNvPr id="19" name="Text 17"/>
+          <p:cNvSpPr/>
+          <p:nvPr/>
+        </p:nvSpPr>
+        <p:spPr>
+          <a:xfrm>
+            <a:off x="777240" y="4736592"/>
+            <a:ext cx="457200" cy="411480"/>
+          </a:xfrm>
+          <a:prstGeom prst="rect">
+            <a:avLst/>
+          </a:prstGeom>
+          <a:noFill/>
+          <a:ln/>
+        </p:spPr>
+        <p:txBody>
+          <a:bodyPr wrap="square" rtlCol="0" anchor="ctr"/>
+          <a:lstStyle/>
+          <a:p>
+            <a:pPr indent="0" marL="0">
+              <a:buNone/>
+            </a:pPr>
+            <a:r>
+              <a:rPr lang="en-US" sz="2000" b="1" dirty="0">
+                <a:solidFill>
+                  <a:srgbClr val="1F6FEB"/>
+                </a:solidFill>
+                <a:latin typeface="Calibri" pitchFamily="34" charset="0"/>
+                <a:ea typeface="Calibri" pitchFamily="34" charset="-122"/>
+                <a:cs typeface="Calibri" pitchFamily="34" charset="-120"/>
+              </a:rPr>
+              <a:t>→</a:t>
+            </a:r>
+            <a:endParaRPr lang="en-US" sz="2000" dirty="0"/>
+          </a:p>
+        </p:txBody>
+      </p:sp>
+      <p:sp>
+        <p:nvSpPr>
+          <p:cNvPr id="20" name="Text 18"/>
+          <p:cNvSpPr/>
+          <p:nvPr/>
+        </p:nvSpPr>
+        <p:spPr>
+          <a:xfrm>
+            <a:off x="1280160" y="4773168"/>
+            <a:ext cx="3474720" cy="365760"/>
+          </a:xfrm>
+          <a:prstGeom prst="rect">
+            <a:avLst/>
+          </a:prstGeom>
+          <a:noFill/>
+          <a:ln/>
+        </p:spPr>
+        <p:txBody>
+          <a:bodyPr wrap="square" rtlCol="0" anchor="ctr"/>
+          <a:lstStyle/>
+          <a:p>
+            <a:pPr indent="0" marL="0">
+              <a:buNone/>
+            </a:pPr>
+            <a:r>
+              <a:rPr lang="en-US" sz="1500" b="1" dirty="0">
+                <a:solidFill>
+                  <a:srgbClr val="FFFFFF"/>
+                </a:solidFill>
+                <a:latin typeface="Calibri" pitchFamily="34" charset="0"/>
+                <a:ea typeface="Calibri" pitchFamily="34" charset="-122"/>
+                <a:cs typeface="Calibri" pitchFamily="34" charset="-120"/>
+              </a:rPr>
+              <a:t>Types catch bugs tests miss</a:t>
+            </a:r>
+            <a:endParaRPr lang="en-US" sz="1500" dirty="0"/>
+          </a:p>
+        </p:txBody>
+      </p:sp>
+      <p:sp>
+        <p:nvSpPr>
+          <p:cNvPr id="21" name="Text 19"/>
+          <p:cNvSpPr/>
+          <p:nvPr/>
+        </p:nvSpPr>
+        <p:spPr>
+          <a:xfrm>
+            <a:off x="4937760" y="4773168"/>
+            <a:ext cx="6492240" cy="365760"/>
+          </a:xfrm>
+          <a:prstGeom prst="rect">
+            <a:avLst/>
+          </a:prstGeom>
+          <a:noFill/>
+          <a:ln/>
+        </p:spPr>
+        <p:txBody>
+          <a:bodyPr wrap="square" rtlCol="0" anchor="ctr"/>
+          <a:lstStyle/>
+          <a:p>
+            <a:pPr indent="0" marL="0">
+              <a:buNone/>
+            </a:pPr>
+            <a:r>
+              <a:rPr lang="en-US" sz="1300" dirty="0">
+                <a:solidFill>
+                  <a:srgbClr val="C9D1D9"/>
+                </a:solidFill>
+                <a:latin typeface="Calibri" pitchFamily="34" charset="0"/>
+                <a:ea typeface="Calibri" pitchFamily="34" charset="-122"/>
+                <a:cs typeface="Calibri" pitchFamily="34" charset="-120"/>
+              </a:rPr>
+              <a:t>Strict TypeScript caught more integration bugs than our unit tests did. Invest in types early.</a:t>
+            </a:r>
+            <a:endParaRPr lang="en-US" sz="1300" dirty="0"/>
+          </a:p>
+        </p:txBody>
+      </p:sp>
+      <p:sp>
+        <p:nvSpPr>
+          <p:cNvPr id="22" name="Footer Left"/>
+          <p:cNvSpPr/>
+          <p:nvPr/>
+        </p:nvSpPr>
+        <p:spPr>
+          <a:xfrm>
+            <a:off x="548640" y="6446520"/>
+            <a:ext cx="1828800" cy="274320"/>
+          </a:xfrm>
+          <a:prstGeom prst="rect">
+            <a:avLst/>
+          </a:prstGeom>
+          <a:noFill/>
+          <a:ln/>
+        </p:spPr>
+        <p:txBody>
+          <a:bodyPr wrap="square" rtlCol="0" anchor="ctr"/>
+          <a:lstStyle/>
+          <a:p>
+            <a:pPr indent="0" marL="0">
+              <a:buNone/>
+            </a:pPr>
+            <a:r>
+              <a:rPr lang="en-US" sz="900" b="1" spc="400" kern="0" dirty="0">
+                <a:solidFill>
+                  <a:srgbClr val="8B949E"/>
+                </a:solidFill>
+                <a:latin typeface="Consolas" pitchFamily="34" charset="0"/>
+                <a:ea typeface="Consolas" pitchFamily="34" charset="-122"/>
+                <a:cs typeface="Consolas" pitchFamily="34" charset="-120"/>
+              </a:rPr>
+              <a:t>GITSCOUT</a:t>
+            </a:r>
+            <a:endParaRPr lang="en-US" sz="900" dirty="0"/>
+          </a:p>
+        </p:txBody>
+      </p:sp>
+      <p:sp>
+        <p:nvSpPr>
+          <p:cNvPr id="23" name="Footer Center"/>
+          <p:cNvSpPr/>
+          <p:nvPr/>
+        </p:nvSpPr>
+        <p:spPr>
+          <a:xfrm>
+            <a:off x="4754880" y="6446520"/>
+            <a:ext cx="2743200" cy="274320"/>
+          </a:xfrm>
+          <a:prstGeom prst="rect">
+            <a:avLst/>
+          </a:prstGeom>
+          <a:noFill/>
+          <a:ln/>
+        </p:spPr>
+        <p:txBody>
+          <a:bodyPr wrap="square" rtlCol="0" anchor="ctr"/>
+          <a:lstStyle/>
+          <a:p>
+            <a:pPr algn="ctr" indent="0" marL="0">
+              <a:buNone/>
+            </a:pPr>
+            <a:r>
+              <a:rPr lang="en-US" sz="900" spc="400" kern="0" dirty="0">
+                <a:solidFill>
+                  <a:srgbClr val="8B949E"/>
+                </a:solidFill>
+                <a:latin typeface="Consolas" pitchFamily="34" charset="0"/>
+                <a:ea typeface="Consolas" pitchFamily="34" charset="-122"/>
+                <a:cs typeface="Consolas" pitchFamily="34" charset="-120"/>
+              </a:rPr>
+              <a:t>LESSONS</a:t>
+            </a:r>
+            <a:endParaRPr lang="en-US" sz="900" dirty="0"/>
+          </a:p>
+        </p:txBody>
+      </p:sp>
+      <p:sp>
+        <p:nvSpPr>
+          <p:cNvPr id="24" name="Footer Right"/>
+          <p:cNvSpPr/>
+          <p:nvPr/>
+        </p:nvSpPr>
+        <p:spPr>
+          <a:xfrm>
+            <a:off x="10698480" y="6446520"/>
+            <a:ext cx="914400" cy="274320"/>
+          </a:xfrm>
+          <a:prstGeom prst="rect">
+            <a:avLst/>
+          </a:prstGeom>
+          <a:noFill/>
+          <a:ln/>
+        </p:spPr>
+        <p:txBody>
+          <a:bodyPr wrap="square" rtlCol="0" anchor="ctr"/>
+          <a:lstStyle/>
+          <a:p>
+            <a:pPr algn="r" indent="0" marL="0">
+              <a:buNone/>
+            </a:pPr>
+            <a:r>
+              <a:rPr lang="en-US" sz="900" b="1" spc="400" kern="0" dirty="0">
+                <a:solidFill>
+                  <a:srgbClr val="8B949E"/>
+                </a:solidFill>
+                <a:latin typeface="Consolas" pitchFamily="34" charset="0"/>
+                <a:ea typeface="Consolas" pitchFamily="34" charset="-122"/>
+                <a:cs typeface="Consolas" pitchFamily="34" charset="-120"/>
+              </a:rPr>
+              <a:t>13</a:t>
+            </a:r>
+            <a:endParaRPr lang="en-US" sz="900" dirty="0"/>
           </a:p>
         </p:txBody>
       </p:sp>
